--- a/Linq.pptx
+++ b/Linq.pptx
@@ -13,9 +13,9 @@
     <p:sldId id="259" r:id="rId4"/>
     <p:sldId id="261" r:id="rId5"/>
     <p:sldId id="260" r:id="rId6"/>
-    <p:sldId id="262" r:id="rId7"/>
-    <p:sldId id="265" r:id="rId8"/>
-    <p:sldId id="263" r:id="rId9"/>
+    <p:sldId id="263" r:id="rId7"/>
+    <p:sldId id="262" r:id="rId8"/>
+    <p:sldId id="265" r:id="rId9"/>
     <p:sldId id="264" r:id="rId10"/>
   </p:sldIdLst>
   <p:sldSz cx="12192000" cy="6858000"/>
@@ -9848,7 +9848,7 @@
           <a:p>
             <a:fld id="{796FDD7A-9F38-4CDF-B347-1A5209BFD58B}" type="datetimeFigureOut">
               <a:rPr lang="en-IN" smtClean="0"/>
-              <a:t>23-02-2026</a:t>
+              <a:t>26-02-2026</a:t>
             </a:fld>
             <a:endParaRPr lang="en-IN"/>
           </a:p>
@@ -10356,7 +10356,7 @@
           <a:p>
             <a:fld id="{C1938870-312B-410B-A6B0-3A5B6A2B0AD3}" type="datetimeFigureOut">
               <a:rPr lang="en-IN" smtClean="0"/>
-              <a:t>23-02-2026</a:t>
+              <a:t>26-02-2026</a:t>
             </a:fld>
             <a:endParaRPr lang="en-IN"/>
           </a:p>
@@ -10556,7 +10556,7 @@
           <a:p>
             <a:fld id="{C1938870-312B-410B-A6B0-3A5B6A2B0AD3}" type="datetimeFigureOut">
               <a:rPr lang="en-IN" smtClean="0"/>
-              <a:t>23-02-2026</a:t>
+              <a:t>26-02-2026</a:t>
             </a:fld>
             <a:endParaRPr lang="en-IN"/>
           </a:p>
@@ -10766,7 +10766,7 @@
           <a:p>
             <a:fld id="{C1938870-312B-410B-A6B0-3A5B6A2B0AD3}" type="datetimeFigureOut">
               <a:rPr lang="en-IN" smtClean="0"/>
-              <a:t>23-02-2026</a:t>
+              <a:t>26-02-2026</a:t>
             </a:fld>
             <a:endParaRPr lang="en-IN"/>
           </a:p>
@@ -10966,7 +10966,7 @@
           <a:p>
             <a:fld id="{C1938870-312B-410B-A6B0-3A5B6A2B0AD3}" type="datetimeFigureOut">
               <a:rPr lang="en-IN" smtClean="0"/>
-              <a:t>23-02-2026</a:t>
+              <a:t>26-02-2026</a:t>
             </a:fld>
             <a:endParaRPr lang="en-IN"/>
           </a:p>
@@ -11242,7 +11242,7 @@
           <a:p>
             <a:fld id="{C1938870-312B-410B-A6B0-3A5B6A2B0AD3}" type="datetimeFigureOut">
               <a:rPr lang="en-IN" smtClean="0"/>
-              <a:t>23-02-2026</a:t>
+              <a:t>26-02-2026</a:t>
             </a:fld>
             <a:endParaRPr lang="en-IN"/>
           </a:p>
@@ -11510,7 +11510,7 @@
           <a:p>
             <a:fld id="{C1938870-312B-410B-A6B0-3A5B6A2B0AD3}" type="datetimeFigureOut">
               <a:rPr lang="en-IN" smtClean="0"/>
-              <a:t>23-02-2026</a:t>
+              <a:t>26-02-2026</a:t>
             </a:fld>
             <a:endParaRPr lang="en-IN"/>
           </a:p>
@@ -11925,7 +11925,7 @@
           <a:p>
             <a:fld id="{C1938870-312B-410B-A6B0-3A5B6A2B0AD3}" type="datetimeFigureOut">
               <a:rPr lang="en-IN" smtClean="0"/>
-              <a:t>23-02-2026</a:t>
+              <a:t>26-02-2026</a:t>
             </a:fld>
             <a:endParaRPr lang="en-IN"/>
           </a:p>
@@ -12067,7 +12067,7 @@
           <a:p>
             <a:fld id="{C1938870-312B-410B-A6B0-3A5B6A2B0AD3}" type="datetimeFigureOut">
               <a:rPr lang="en-IN" smtClean="0"/>
-              <a:t>23-02-2026</a:t>
+              <a:t>26-02-2026</a:t>
             </a:fld>
             <a:endParaRPr lang="en-IN"/>
           </a:p>
@@ -12180,7 +12180,7 @@
           <a:p>
             <a:fld id="{C1938870-312B-410B-A6B0-3A5B6A2B0AD3}" type="datetimeFigureOut">
               <a:rPr lang="en-IN" smtClean="0"/>
-              <a:t>23-02-2026</a:t>
+              <a:t>26-02-2026</a:t>
             </a:fld>
             <a:endParaRPr lang="en-IN"/>
           </a:p>
@@ -12493,7 +12493,7 @@
           <a:p>
             <a:fld id="{C1938870-312B-410B-A6B0-3A5B6A2B0AD3}" type="datetimeFigureOut">
               <a:rPr lang="en-IN" smtClean="0"/>
-              <a:t>23-02-2026</a:t>
+              <a:t>26-02-2026</a:t>
             </a:fld>
             <a:endParaRPr lang="en-IN"/>
           </a:p>
@@ -12782,7 +12782,7 @@
           <a:p>
             <a:fld id="{C1938870-312B-410B-A6B0-3A5B6A2B0AD3}" type="datetimeFigureOut">
               <a:rPr lang="en-IN" smtClean="0"/>
-              <a:t>23-02-2026</a:t>
+              <a:t>26-02-2026</a:t>
             </a:fld>
             <a:endParaRPr lang="en-IN"/>
           </a:p>
@@ -13025,7 +13025,7 @@
           <a:p>
             <a:fld id="{C1938870-312B-410B-A6B0-3A5B6A2B0AD3}" type="datetimeFigureOut">
               <a:rPr lang="en-IN" smtClean="0"/>
-              <a:t>23-02-2026</a:t>
+              <a:t>26-02-2026</a:t>
             </a:fld>
             <a:endParaRPr lang="en-IN"/>
           </a:p>
@@ -13533,10 +13533,58 @@
           <a:bodyPr/>
           <a:lstStyle/>
           <a:p>
-            <a:endParaRPr lang="en-IN" dirty="0"/>
+            <a:r>
+              <a:rPr lang="en-US" dirty="0">
+                <a:solidFill>
+                  <a:srgbClr val="00B0F0"/>
+                </a:solidFill>
+              </a:rPr>
+              <a:t>LINQ Query &amp; Method Syntax with Objects, XML, JSON, DataSets, and Entity Framework</a:t>
+            </a:r>
+            <a:endParaRPr lang="en-IN" dirty="0">
+              <a:solidFill>
+                <a:srgbClr val="00B0F0"/>
+              </a:solidFill>
+            </a:endParaRPr>
           </a:p>
         </p:txBody>
       </p:sp>
+      <p:pic>
+        <p:nvPicPr>
+          <p:cNvPr id="5" name="Picture 4">
+            <a:extLst>
+              <a:ext uri="{FF2B5EF4-FFF2-40B4-BE49-F238E27FC236}">
+                <a16:creationId xmlns:a16="http://schemas.microsoft.com/office/drawing/2014/main" id="{530C7B9E-5839-F2AC-E348-F35A67C2E398}"/>
+              </a:ext>
+            </a:extLst>
+          </p:cNvPr>
+          <p:cNvPicPr>
+            <a:picLocks noChangeAspect="1"/>
+          </p:cNvPicPr>
+          <p:nvPr/>
+        </p:nvPicPr>
+        <p:blipFill>
+          <a:blip r:embed="rId3">
+            <a:extLst>
+              <a:ext uri="{28A0092B-C50C-407E-A947-70E740481C1C}">
+                <a14:useLocalDpi xmlns:a14="http://schemas.microsoft.com/office/drawing/2010/main" val="0"/>
+              </a:ext>
+            </a:extLst>
+          </a:blip>
+          <a:stretch>
+            <a:fillRect/>
+          </a:stretch>
+        </p:blipFill>
+        <p:spPr>
+          <a:xfrm>
+            <a:off x="220089" y="4935792"/>
+            <a:ext cx="1738094" cy="1720647"/>
+          </a:xfrm>
+          <a:prstGeom prst="rect">
+            <a:avLst/>
+          </a:prstGeom>
+        </p:spPr>
+      </p:pic>
     </p:spTree>
     <p:extLst>
       <p:ext uri="{BB962C8B-B14F-4D97-AF65-F5344CB8AC3E}">
@@ -13547,6 +13595,154 @@
   <p:clrMapOvr>
     <a:masterClrMapping/>
   </p:clrMapOvr>
+  <p:timing>
+    <p:tnLst>
+      <p:par>
+        <p:cTn id="1" dur="indefinite" restart="never" nodeType="tmRoot">
+          <p:childTnLst>
+            <p:seq concurrent="1" nextAc="seek">
+              <p:cTn id="2" dur="indefinite" nodeType="mainSeq">
+                <p:childTnLst>
+                  <p:par>
+                    <p:cTn id="3" fill="hold">
+                      <p:stCondLst>
+                        <p:cond delay="indefinite"/>
+                      </p:stCondLst>
+                      <p:childTnLst>
+                        <p:par>
+                          <p:cTn id="4" fill="hold">
+                            <p:stCondLst>
+                              <p:cond delay="0"/>
+                            </p:stCondLst>
+                            <p:childTnLst>
+                              <p:par>
+                                <p:cTn id="5" presetID="10" presetClass="entr" presetSubtype="0" fill="hold" grpId="0" nodeType="clickEffect">
+                                  <p:stCondLst>
+                                    <p:cond delay="0"/>
+                                  </p:stCondLst>
+                                  <p:childTnLst>
+                                    <p:set>
+                                      <p:cBhvr>
+                                        <p:cTn id="6" dur="1" fill="hold">
+                                          <p:stCondLst>
+                                            <p:cond delay="0"/>
+                                          </p:stCondLst>
+                                        </p:cTn>
+                                        <p:tgtEl>
+                                          <p:spTgt spid="2"/>
+                                        </p:tgtEl>
+                                        <p:attrNameLst>
+                                          <p:attrName>style.visibility</p:attrName>
+                                        </p:attrNameLst>
+                                      </p:cBhvr>
+                                      <p:to>
+                                        <p:strVal val="visible"/>
+                                      </p:to>
+                                    </p:set>
+                                    <p:animEffect transition="in" filter="fade">
+                                      <p:cBhvr>
+                                        <p:cTn id="7" dur="500"/>
+                                        <p:tgtEl>
+                                          <p:spTgt spid="2"/>
+                                        </p:tgtEl>
+                                      </p:cBhvr>
+                                    </p:animEffect>
+                                  </p:childTnLst>
+                                </p:cTn>
+                              </p:par>
+                            </p:childTnLst>
+                          </p:cTn>
+                        </p:par>
+                      </p:childTnLst>
+                    </p:cTn>
+                  </p:par>
+                  <p:par>
+                    <p:cTn id="8" fill="hold">
+                      <p:stCondLst>
+                        <p:cond delay="indefinite"/>
+                      </p:stCondLst>
+                      <p:childTnLst>
+                        <p:par>
+                          <p:cTn id="9" fill="hold">
+                            <p:stCondLst>
+                              <p:cond delay="0"/>
+                            </p:stCondLst>
+                            <p:childTnLst>
+                              <p:par>
+                                <p:cTn id="10" presetID="10" presetClass="entr" presetSubtype="0" fill="hold" grpId="0" nodeType="clickEffect">
+                                  <p:stCondLst>
+                                    <p:cond delay="0"/>
+                                  </p:stCondLst>
+                                  <p:childTnLst>
+                                    <p:set>
+                                      <p:cBhvr>
+                                        <p:cTn id="11" dur="1" fill="hold">
+                                          <p:stCondLst>
+                                            <p:cond delay="0"/>
+                                          </p:stCondLst>
+                                        </p:cTn>
+                                        <p:tgtEl>
+                                          <p:spTgt spid="3">
+                                            <p:txEl>
+                                              <p:pRg st="0" end="0"/>
+                                            </p:txEl>
+                                          </p:spTgt>
+                                        </p:tgtEl>
+                                        <p:attrNameLst>
+                                          <p:attrName>style.visibility</p:attrName>
+                                        </p:attrNameLst>
+                                      </p:cBhvr>
+                                      <p:to>
+                                        <p:strVal val="visible"/>
+                                      </p:to>
+                                    </p:set>
+                                    <p:animEffect transition="in" filter="fade">
+                                      <p:cBhvr>
+                                        <p:cTn id="12" dur="500"/>
+                                        <p:tgtEl>
+                                          <p:spTgt spid="3">
+                                            <p:txEl>
+                                              <p:pRg st="0" end="0"/>
+                                            </p:txEl>
+                                          </p:spTgt>
+                                        </p:tgtEl>
+                                      </p:cBhvr>
+                                    </p:animEffect>
+                                  </p:childTnLst>
+                                </p:cTn>
+                              </p:par>
+                            </p:childTnLst>
+                          </p:cTn>
+                        </p:par>
+                      </p:childTnLst>
+                    </p:cTn>
+                  </p:par>
+                </p:childTnLst>
+              </p:cTn>
+              <p:prevCondLst>
+                <p:cond evt="onPrev" delay="0">
+                  <p:tgtEl>
+                    <p:sldTgt/>
+                  </p:tgtEl>
+                </p:cond>
+              </p:prevCondLst>
+              <p:nextCondLst>
+                <p:cond evt="onNext" delay="0">
+                  <p:tgtEl>
+                    <p:sldTgt/>
+                  </p:tgtEl>
+                </p:cond>
+              </p:nextCondLst>
+            </p:seq>
+          </p:childTnLst>
+        </p:cTn>
+      </p:par>
+    </p:tnLst>
+    <p:bldLst>
+      <p:bldP spid="2" grpId="0"/>
+      <p:bldP spid="3" grpId="0" build="p"/>
+    </p:bldLst>
+  </p:timing>
 </p:sld>
 </file>
 
@@ -13767,7 +13963,7 @@
         </p:spPr>
         <p:txBody>
           <a:bodyPr vert="horz" lIns="91440" tIns="45720" rIns="91440" bIns="45720" rtlCol="0">
-            <a:normAutofit/>
+            <a:normAutofit lnSpcReduction="10000"/>
           </a:bodyPr>
           <a:lstStyle>
             <a:lvl1pPr marL="228600" indent="-228600" algn="l" defTabSz="914400" rtl="0" eaLnBrk="1" latinLnBrk="0" hangingPunct="1">
@@ -14024,6 +14220,42 @@
                   </a:schemeClr>
                 </a:solidFill>
               </a:rPr>
+              <a:t>Element Operations</a:t>
+            </a:r>
+          </a:p>
+          <a:p>
+            <a:pPr lvl="1">
+              <a:lnSpc>
+                <a:spcPct val="100000"/>
+              </a:lnSpc>
+            </a:pPr>
+            <a:r>
+              <a:rPr lang="en-IN" dirty="0">
+                <a:solidFill>
+                  <a:schemeClr val="accent5">
+                    <a:lumMod val="40000"/>
+                    <a:lumOff val="60000"/>
+                  </a:schemeClr>
+                </a:solidFill>
+              </a:rPr>
+              <a:t>Aggregate Operations</a:t>
+            </a:r>
+          </a:p>
+          <a:p>
+            <a:pPr lvl="1">
+              <a:lnSpc>
+                <a:spcPct val="100000"/>
+              </a:lnSpc>
+            </a:pPr>
+            <a:r>
+              <a:rPr lang="en-IN" dirty="0">
+                <a:solidFill>
+                  <a:schemeClr val="accent5">
+                    <a:lumMod val="40000"/>
+                    <a:lumOff val="60000"/>
+                  </a:schemeClr>
+                </a:solidFill>
+              </a:rPr>
               <a:t>Quantifier Operations</a:t>
             </a:r>
           </a:p>
@@ -14112,6 +14344,513 @@
   <p:clrMapOvr>
     <a:masterClrMapping/>
   </p:clrMapOvr>
+  <p:timing>
+    <p:tnLst>
+      <p:par>
+        <p:cTn id="1" dur="indefinite" restart="never" nodeType="tmRoot">
+          <p:childTnLst>
+            <p:seq concurrent="1" nextAc="seek">
+              <p:cTn id="2" dur="indefinite" nodeType="mainSeq">
+                <p:childTnLst>
+                  <p:par>
+                    <p:cTn id="3" fill="hold">
+                      <p:stCondLst>
+                        <p:cond delay="indefinite"/>
+                      </p:stCondLst>
+                      <p:childTnLst>
+                        <p:par>
+                          <p:cTn id="4" fill="hold">
+                            <p:stCondLst>
+                              <p:cond delay="0"/>
+                            </p:stCondLst>
+                            <p:childTnLst>
+                              <p:par>
+                                <p:cTn id="5" presetID="10" presetClass="entr" presetSubtype="0" fill="hold" grpId="0" nodeType="clickEffect">
+                                  <p:stCondLst>
+                                    <p:cond delay="0"/>
+                                  </p:stCondLst>
+                                  <p:childTnLst>
+                                    <p:set>
+                                      <p:cBhvr>
+                                        <p:cTn id="6" dur="1" fill="hold">
+                                          <p:stCondLst>
+                                            <p:cond delay="0"/>
+                                          </p:stCondLst>
+                                        </p:cTn>
+                                        <p:tgtEl>
+                                          <p:spTgt spid="2"/>
+                                        </p:tgtEl>
+                                        <p:attrNameLst>
+                                          <p:attrName>style.visibility</p:attrName>
+                                        </p:attrNameLst>
+                                      </p:cBhvr>
+                                      <p:to>
+                                        <p:strVal val="visible"/>
+                                      </p:to>
+                                    </p:set>
+                                    <p:animEffect transition="in" filter="fade">
+                                      <p:cBhvr>
+                                        <p:cTn id="7" dur="500"/>
+                                        <p:tgtEl>
+                                          <p:spTgt spid="2"/>
+                                        </p:tgtEl>
+                                      </p:cBhvr>
+                                    </p:animEffect>
+                                  </p:childTnLst>
+                                </p:cTn>
+                              </p:par>
+                            </p:childTnLst>
+                          </p:cTn>
+                        </p:par>
+                      </p:childTnLst>
+                    </p:cTn>
+                  </p:par>
+                  <p:par>
+                    <p:cTn id="8" fill="hold">
+                      <p:stCondLst>
+                        <p:cond delay="indefinite"/>
+                      </p:stCondLst>
+                      <p:childTnLst>
+                        <p:par>
+                          <p:cTn id="9" fill="hold">
+                            <p:stCondLst>
+                              <p:cond delay="0"/>
+                            </p:stCondLst>
+                            <p:childTnLst>
+                              <p:par>
+                                <p:cTn id="10" presetID="10" presetClass="entr" presetSubtype="0" fill="hold" grpId="0" nodeType="clickEffect">
+                                  <p:stCondLst>
+                                    <p:cond delay="0"/>
+                                  </p:stCondLst>
+                                  <p:childTnLst>
+                                    <p:set>
+                                      <p:cBhvr>
+                                        <p:cTn id="11" dur="1" fill="hold">
+                                          <p:stCondLst>
+                                            <p:cond delay="0"/>
+                                          </p:stCondLst>
+                                        </p:cTn>
+                                        <p:tgtEl>
+                                          <p:spTgt spid="3">
+                                            <p:txEl>
+                                              <p:pRg st="0" end="0"/>
+                                            </p:txEl>
+                                          </p:spTgt>
+                                        </p:tgtEl>
+                                        <p:attrNameLst>
+                                          <p:attrName>style.visibility</p:attrName>
+                                        </p:attrNameLst>
+                                      </p:cBhvr>
+                                      <p:to>
+                                        <p:strVal val="visible"/>
+                                      </p:to>
+                                    </p:set>
+                                    <p:animEffect transition="in" filter="fade">
+                                      <p:cBhvr>
+                                        <p:cTn id="12" dur="500"/>
+                                        <p:tgtEl>
+                                          <p:spTgt spid="3">
+                                            <p:txEl>
+                                              <p:pRg st="0" end="0"/>
+                                            </p:txEl>
+                                          </p:spTgt>
+                                        </p:tgtEl>
+                                      </p:cBhvr>
+                                    </p:animEffect>
+                                  </p:childTnLst>
+                                </p:cTn>
+                              </p:par>
+                            </p:childTnLst>
+                          </p:cTn>
+                        </p:par>
+                      </p:childTnLst>
+                    </p:cTn>
+                  </p:par>
+                  <p:par>
+                    <p:cTn id="13" fill="hold">
+                      <p:stCondLst>
+                        <p:cond delay="indefinite"/>
+                      </p:stCondLst>
+                      <p:childTnLst>
+                        <p:par>
+                          <p:cTn id="14" fill="hold">
+                            <p:stCondLst>
+                              <p:cond delay="0"/>
+                            </p:stCondLst>
+                            <p:childTnLst>
+                              <p:par>
+                                <p:cTn id="15" presetID="10" presetClass="entr" presetSubtype="0" fill="hold" grpId="0" nodeType="clickEffect">
+                                  <p:stCondLst>
+                                    <p:cond delay="0"/>
+                                  </p:stCondLst>
+                                  <p:childTnLst>
+                                    <p:set>
+                                      <p:cBhvr>
+                                        <p:cTn id="16" dur="1" fill="hold">
+                                          <p:stCondLst>
+                                            <p:cond delay="0"/>
+                                          </p:stCondLst>
+                                        </p:cTn>
+                                        <p:tgtEl>
+                                          <p:spTgt spid="3">
+                                            <p:txEl>
+                                              <p:pRg st="1" end="1"/>
+                                            </p:txEl>
+                                          </p:spTgt>
+                                        </p:tgtEl>
+                                        <p:attrNameLst>
+                                          <p:attrName>style.visibility</p:attrName>
+                                        </p:attrNameLst>
+                                      </p:cBhvr>
+                                      <p:to>
+                                        <p:strVal val="visible"/>
+                                      </p:to>
+                                    </p:set>
+                                    <p:animEffect transition="in" filter="fade">
+                                      <p:cBhvr>
+                                        <p:cTn id="17" dur="500"/>
+                                        <p:tgtEl>
+                                          <p:spTgt spid="3">
+                                            <p:txEl>
+                                              <p:pRg st="1" end="1"/>
+                                            </p:txEl>
+                                          </p:spTgt>
+                                        </p:tgtEl>
+                                      </p:cBhvr>
+                                    </p:animEffect>
+                                  </p:childTnLst>
+                                </p:cTn>
+                              </p:par>
+                            </p:childTnLst>
+                          </p:cTn>
+                        </p:par>
+                      </p:childTnLst>
+                    </p:cTn>
+                  </p:par>
+                  <p:par>
+                    <p:cTn id="18" fill="hold">
+                      <p:stCondLst>
+                        <p:cond delay="indefinite"/>
+                      </p:stCondLst>
+                      <p:childTnLst>
+                        <p:par>
+                          <p:cTn id="19" fill="hold">
+                            <p:stCondLst>
+                              <p:cond delay="0"/>
+                            </p:stCondLst>
+                            <p:childTnLst>
+                              <p:par>
+                                <p:cTn id="20" presetID="10" presetClass="entr" presetSubtype="0" fill="hold" grpId="0" nodeType="clickEffect">
+                                  <p:stCondLst>
+                                    <p:cond delay="0"/>
+                                  </p:stCondLst>
+                                  <p:childTnLst>
+                                    <p:set>
+                                      <p:cBhvr>
+                                        <p:cTn id="21" dur="1" fill="hold">
+                                          <p:stCondLst>
+                                            <p:cond delay="0"/>
+                                          </p:stCondLst>
+                                        </p:cTn>
+                                        <p:tgtEl>
+                                          <p:spTgt spid="3">
+                                            <p:txEl>
+                                              <p:pRg st="2" end="2"/>
+                                            </p:txEl>
+                                          </p:spTgt>
+                                        </p:tgtEl>
+                                        <p:attrNameLst>
+                                          <p:attrName>style.visibility</p:attrName>
+                                        </p:attrNameLst>
+                                      </p:cBhvr>
+                                      <p:to>
+                                        <p:strVal val="visible"/>
+                                      </p:to>
+                                    </p:set>
+                                    <p:animEffect transition="in" filter="fade">
+                                      <p:cBhvr>
+                                        <p:cTn id="22" dur="500"/>
+                                        <p:tgtEl>
+                                          <p:spTgt spid="3">
+                                            <p:txEl>
+                                              <p:pRg st="2" end="2"/>
+                                            </p:txEl>
+                                          </p:spTgt>
+                                        </p:tgtEl>
+                                      </p:cBhvr>
+                                    </p:animEffect>
+                                  </p:childTnLst>
+                                </p:cTn>
+                              </p:par>
+                            </p:childTnLst>
+                          </p:cTn>
+                        </p:par>
+                      </p:childTnLst>
+                    </p:cTn>
+                  </p:par>
+                  <p:par>
+                    <p:cTn id="23" fill="hold">
+                      <p:stCondLst>
+                        <p:cond delay="indefinite"/>
+                      </p:stCondLst>
+                      <p:childTnLst>
+                        <p:par>
+                          <p:cTn id="24" fill="hold">
+                            <p:stCondLst>
+                              <p:cond delay="0"/>
+                            </p:stCondLst>
+                            <p:childTnLst>
+                              <p:par>
+                                <p:cTn id="25" presetID="10" presetClass="entr" presetSubtype="0" fill="hold" grpId="0" nodeType="clickEffect">
+                                  <p:stCondLst>
+                                    <p:cond delay="0"/>
+                                  </p:stCondLst>
+                                  <p:childTnLst>
+                                    <p:set>
+                                      <p:cBhvr>
+                                        <p:cTn id="26" dur="1" fill="hold">
+                                          <p:stCondLst>
+                                            <p:cond delay="0"/>
+                                          </p:stCondLst>
+                                        </p:cTn>
+                                        <p:tgtEl>
+                                          <p:spTgt spid="3">
+                                            <p:txEl>
+                                              <p:pRg st="3" end="3"/>
+                                            </p:txEl>
+                                          </p:spTgt>
+                                        </p:tgtEl>
+                                        <p:attrNameLst>
+                                          <p:attrName>style.visibility</p:attrName>
+                                        </p:attrNameLst>
+                                      </p:cBhvr>
+                                      <p:to>
+                                        <p:strVal val="visible"/>
+                                      </p:to>
+                                    </p:set>
+                                    <p:animEffect transition="in" filter="fade">
+                                      <p:cBhvr>
+                                        <p:cTn id="27" dur="500"/>
+                                        <p:tgtEl>
+                                          <p:spTgt spid="3">
+                                            <p:txEl>
+                                              <p:pRg st="3" end="3"/>
+                                            </p:txEl>
+                                          </p:spTgt>
+                                        </p:tgtEl>
+                                      </p:cBhvr>
+                                    </p:animEffect>
+                                  </p:childTnLst>
+                                </p:cTn>
+                              </p:par>
+                            </p:childTnLst>
+                          </p:cTn>
+                        </p:par>
+                      </p:childTnLst>
+                    </p:cTn>
+                  </p:par>
+                  <p:par>
+                    <p:cTn id="28" fill="hold">
+                      <p:stCondLst>
+                        <p:cond delay="indefinite"/>
+                      </p:stCondLst>
+                      <p:childTnLst>
+                        <p:par>
+                          <p:cTn id="29" fill="hold">
+                            <p:stCondLst>
+                              <p:cond delay="0"/>
+                            </p:stCondLst>
+                            <p:childTnLst>
+                              <p:par>
+                                <p:cTn id="30" presetID="10" presetClass="entr" presetSubtype="0" fill="hold" grpId="0" nodeType="clickEffect">
+                                  <p:stCondLst>
+                                    <p:cond delay="0"/>
+                                  </p:stCondLst>
+                                  <p:childTnLst>
+                                    <p:set>
+                                      <p:cBhvr>
+                                        <p:cTn id="31" dur="1" fill="hold">
+                                          <p:stCondLst>
+                                            <p:cond delay="0"/>
+                                          </p:stCondLst>
+                                        </p:cTn>
+                                        <p:tgtEl>
+                                          <p:spTgt spid="3">
+                                            <p:txEl>
+                                              <p:pRg st="4" end="4"/>
+                                            </p:txEl>
+                                          </p:spTgt>
+                                        </p:tgtEl>
+                                        <p:attrNameLst>
+                                          <p:attrName>style.visibility</p:attrName>
+                                        </p:attrNameLst>
+                                      </p:cBhvr>
+                                      <p:to>
+                                        <p:strVal val="visible"/>
+                                      </p:to>
+                                    </p:set>
+                                    <p:animEffect transition="in" filter="fade">
+                                      <p:cBhvr>
+                                        <p:cTn id="32" dur="500"/>
+                                        <p:tgtEl>
+                                          <p:spTgt spid="3">
+                                            <p:txEl>
+                                              <p:pRg st="4" end="4"/>
+                                            </p:txEl>
+                                          </p:spTgt>
+                                        </p:tgtEl>
+                                      </p:cBhvr>
+                                    </p:animEffect>
+                                  </p:childTnLst>
+                                </p:cTn>
+                              </p:par>
+                            </p:childTnLst>
+                          </p:cTn>
+                        </p:par>
+                      </p:childTnLst>
+                    </p:cTn>
+                  </p:par>
+                  <p:par>
+                    <p:cTn id="33" fill="hold">
+                      <p:stCondLst>
+                        <p:cond delay="indefinite"/>
+                      </p:stCondLst>
+                      <p:childTnLst>
+                        <p:par>
+                          <p:cTn id="34" fill="hold">
+                            <p:stCondLst>
+                              <p:cond delay="0"/>
+                            </p:stCondLst>
+                            <p:childTnLst>
+                              <p:par>
+                                <p:cTn id="35" presetID="10" presetClass="entr" presetSubtype="0" fill="hold" grpId="0" nodeType="clickEffect">
+                                  <p:stCondLst>
+                                    <p:cond delay="0"/>
+                                  </p:stCondLst>
+                                  <p:childTnLst>
+                                    <p:set>
+                                      <p:cBhvr>
+                                        <p:cTn id="36" dur="1" fill="hold">
+                                          <p:stCondLst>
+                                            <p:cond delay="0"/>
+                                          </p:stCondLst>
+                                        </p:cTn>
+                                        <p:tgtEl>
+                                          <p:spTgt spid="3">
+                                            <p:txEl>
+                                              <p:pRg st="5" end="5"/>
+                                            </p:txEl>
+                                          </p:spTgt>
+                                        </p:tgtEl>
+                                        <p:attrNameLst>
+                                          <p:attrName>style.visibility</p:attrName>
+                                        </p:attrNameLst>
+                                      </p:cBhvr>
+                                      <p:to>
+                                        <p:strVal val="visible"/>
+                                      </p:to>
+                                    </p:set>
+                                    <p:animEffect transition="in" filter="fade">
+                                      <p:cBhvr>
+                                        <p:cTn id="37" dur="500"/>
+                                        <p:tgtEl>
+                                          <p:spTgt spid="3">
+                                            <p:txEl>
+                                              <p:pRg st="5" end="5"/>
+                                            </p:txEl>
+                                          </p:spTgt>
+                                        </p:tgtEl>
+                                      </p:cBhvr>
+                                    </p:animEffect>
+                                  </p:childTnLst>
+                                </p:cTn>
+                              </p:par>
+                            </p:childTnLst>
+                          </p:cTn>
+                        </p:par>
+                      </p:childTnLst>
+                    </p:cTn>
+                  </p:par>
+                  <p:par>
+                    <p:cTn id="38" fill="hold">
+                      <p:stCondLst>
+                        <p:cond delay="indefinite"/>
+                      </p:stCondLst>
+                      <p:childTnLst>
+                        <p:par>
+                          <p:cTn id="39" fill="hold">
+                            <p:stCondLst>
+                              <p:cond delay="0"/>
+                            </p:stCondLst>
+                            <p:childTnLst>
+                              <p:par>
+                                <p:cTn id="40" presetID="10" presetClass="entr" presetSubtype="0" fill="hold" grpId="0" nodeType="clickEffect">
+                                  <p:stCondLst>
+                                    <p:cond delay="0"/>
+                                  </p:stCondLst>
+                                  <p:childTnLst>
+                                    <p:set>
+                                      <p:cBhvr>
+                                        <p:cTn id="41" dur="1" fill="hold">
+                                          <p:stCondLst>
+                                            <p:cond delay="0"/>
+                                          </p:stCondLst>
+                                        </p:cTn>
+                                        <p:tgtEl>
+                                          <p:spTgt spid="4"/>
+                                        </p:tgtEl>
+                                        <p:attrNameLst>
+                                          <p:attrName>style.visibility</p:attrName>
+                                        </p:attrNameLst>
+                                      </p:cBhvr>
+                                      <p:to>
+                                        <p:strVal val="visible"/>
+                                      </p:to>
+                                    </p:set>
+                                    <p:animEffect transition="in" filter="fade">
+                                      <p:cBhvr>
+                                        <p:cTn id="42" dur="500"/>
+                                        <p:tgtEl>
+                                          <p:spTgt spid="4"/>
+                                        </p:tgtEl>
+                                      </p:cBhvr>
+                                    </p:animEffect>
+                                  </p:childTnLst>
+                                </p:cTn>
+                              </p:par>
+                            </p:childTnLst>
+                          </p:cTn>
+                        </p:par>
+                      </p:childTnLst>
+                    </p:cTn>
+                  </p:par>
+                </p:childTnLst>
+              </p:cTn>
+              <p:prevCondLst>
+                <p:cond evt="onPrev" delay="0">
+                  <p:tgtEl>
+                    <p:sldTgt/>
+                  </p:tgtEl>
+                </p:cond>
+              </p:prevCondLst>
+              <p:nextCondLst>
+                <p:cond evt="onNext" delay="0">
+                  <p:tgtEl>
+                    <p:sldTgt/>
+                  </p:tgtEl>
+                </p:cond>
+              </p:nextCondLst>
+            </p:seq>
+          </p:childTnLst>
+        </p:cTn>
+      </p:par>
+    </p:tnLst>
+    <p:bldLst>
+      <p:bldP spid="2" grpId="0"/>
+      <p:bldP spid="3" grpId="0" build="p"/>
+      <p:bldP spid="4" grpId="0"/>
+    </p:bldLst>
+  </p:timing>
 </p:sld>
 </file>
 
@@ -15507,10 +16246,1243 @@
   <p:clrMapOvr>
     <a:masterClrMapping/>
   </p:clrMapOvr>
+  <p:timing>
+    <p:tnLst>
+      <p:par>
+        <p:cTn id="1" dur="indefinite" restart="never" nodeType="tmRoot">
+          <p:childTnLst>
+            <p:seq concurrent="1" nextAc="seek">
+              <p:cTn id="2" dur="indefinite" nodeType="mainSeq">
+                <p:childTnLst>
+                  <p:par>
+                    <p:cTn id="3" fill="hold">
+                      <p:stCondLst>
+                        <p:cond delay="indefinite"/>
+                      </p:stCondLst>
+                      <p:childTnLst>
+                        <p:par>
+                          <p:cTn id="4" fill="hold">
+                            <p:stCondLst>
+                              <p:cond delay="0"/>
+                            </p:stCondLst>
+                            <p:childTnLst>
+                              <p:par>
+                                <p:cTn id="5" presetID="10" presetClass="entr" presetSubtype="0" fill="hold" grpId="0" nodeType="clickEffect">
+                                  <p:stCondLst>
+                                    <p:cond delay="0"/>
+                                  </p:stCondLst>
+                                  <p:childTnLst>
+                                    <p:set>
+                                      <p:cBhvr>
+                                        <p:cTn id="6" dur="1" fill="hold">
+                                          <p:stCondLst>
+                                            <p:cond delay="0"/>
+                                          </p:stCondLst>
+                                        </p:cTn>
+                                        <p:tgtEl>
+                                          <p:spTgt spid="2"/>
+                                        </p:tgtEl>
+                                        <p:attrNameLst>
+                                          <p:attrName>style.visibility</p:attrName>
+                                        </p:attrNameLst>
+                                      </p:cBhvr>
+                                      <p:to>
+                                        <p:strVal val="visible"/>
+                                      </p:to>
+                                    </p:set>
+                                    <p:animEffect transition="in" filter="fade">
+                                      <p:cBhvr>
+                                        <p:cTn id="7" dur="500"/>
+                                        <p:tgtEl>
+                                          <p:spTgt spid="2"/>
+                                        </p:tgtEl>
+                                      </p:cBhvr>
+                                    </p:animEffect>
+                                  </p:childTnLst>
+                                </p:cTn>
+                              </p:par>
+                            </p:childTnLst>
+                          </p:cTn>
+                        </p:par>
+                      </p:childTnLst>
+                    </p:cTn>
+                  </p:par>
+                  <p:par>
+                    <p:cTn id="8" fill="hold">
+                      <p:stCondLst>
+                        <p:cond delay="indefinite"/>
+                      </p:stCondLst>
+                      <p:childTnLst>
+                        <p:par>
+                          <p:cTn id="9" fill="hold">
+                            <p:stCondLst>
+                              <p:cond delay="0"/>
+                            </p:stCondLst>
+                            <p:childTnLst>
+                              <p:par>
+                                <p:cTn id="10" presetID="10" presetClass="entr" presetSubtype="0" fill="hold" nodeType="clickEffect">
+                                  <p:stCondLst>
+                                    <p:cond delay="0"/>
+                                  </p:stCondLst>
+                                  <p:childTnLst>
+                                    <p:set>
+                                      <p:cBhvr>
+                                        <p:cTn id="11" dur="1" fill="hold">
+                                          <p:stCondLst>
+                                            <p:cond delay="0"/>
+                                          </p:stCondLst>
+                                        </p:cTn>
+                                        <p:tgtEl>
+                                          <p:spTgt spid="4"/>
+                                        </p:tgtEl>
+                                        <p:attrNameLst>
+                                          <p:attrName>style.visibility</p:attrName>
+                                        </p:attrNameLst>
+                                      </p:cBhvr>
+                                      <p:to>
+                                        <p:strVal val="visible"/>
+                                      </p:to>
+                                    </p:set>
+                                    <p:animEffect transition="in" filter="fade">
+                                      <p:cBhvr>
+                                        <p:cTn id="12" dur="500"/>
+                                        <p:tgtEl>
+                                          <p:spTgt spid="4"/>
+                                        </p:tgtEl>
+                                      </p:cBhvr>
+                                    </p:animEffect>
+                                  </p:childTnLst>
+                                </p:cTn>
+                              </p:par>
+                            </p:childTnLst>
+                          </p:cTn>
+                        </p:par>
+                      </p:childTnLst>
+                    </p:cTn>
+                  </p:par>
+                </p:childTnLst>
+              </p:cTn>
+              <p:prevCondLst>
+                <p:cond evt="onPrev" delay="0">
+                  <p:tgtEl>
+                    <p:sldTgt/>
+                  </p:tgtEl>
+                </p:cond>
+              </p:prevCondLst>
+              <p:nextCondLst>
+                <p:cond evt="onNext" delay="0">
+                  <p:tgtEl>
+                    <p:sldTgt/>
+                  </p:tgtEl>
+                </p:cond>
+              </p:nextCondLst>
+            </p:seq>
+          </p:childTnLst>
+        </p:cTn>
+      </p:par>
+    </p:tnLst>
+    <p:bldLst>
+      <p:bldP spid="2" grpId="0"/>
+    </p:bldLst>
+  </p:timing>
 </p:sld>
 </file>
 
 <file path=ppt/slides/slide6.xml><?xml version="1.0" encoding="utf-8"?>
+<p:sld xmlns:a="http://schemas.openxmlformats.org/drawingml/2006/main" xmlns:r="http://schemas.openxmlformats.org/officeDocument/2006/relationships" xmlns:p="http://schemas.openxmlformats.org/presentationml/2006/main">
+  <p:cSld>
+    <p:spTree>
+      <p:nvGrpSpPr>
+        <p:cNvPr id="1" name="">
+          <a:extLst>
+            <a:ext uri="{FF2B5EF4-FFF2-40B4-BE49-F238E27FC236}">
+              <a16:creationId xmlns:a16="http://schemas.microsoft.com/office/drawing/2014/main" id="{FC68B9D3-0BC3-107C-D900-4DC26FB85BBD}"/>
+            </a:ext>
+          </a:extLst>
+        </p:cNvPr>
+        <p:cNvGrpSpPr/>
+        <p:nvPr/>
+      </p:nvGrpSpPr>
+      <p:grpSpPr>
+        <a:xfrm>
+          <a:off x="0" y="0"/>
+          <a:ext cx="0" cy="0"/>
+          <a:chOff x="0" y="0"/>
+          <a:chExt cx="0" cy="0"/>
+        </a:xfrm>
+      </p:grpSpPr>
+      <p:pic>
+        <p:nvPicPr>
+          <p:cNvPr id="5" name="Picture 4">
+            <a:extLst>
+              <a:ext uri="{FF2B5EF4-FFF2-40B4-BE49-F238E27FC236}">
+                <a16:creationId xmlns:a16="http://schemas.microsoft.com/office/drawing/2014/main" id="{1A612FC7-F634-7707-2603-B98EC4A18039}"/>
+              </a:ext>
+            </a:extLst>
+          </p:cNvPr>
+          <p:cNvPicPr>
+            <a:picLocks noChangeAspect="1"/>
+          </p:cNvPicPr>
+          <p:nvPr/>
+        </p:nvPicPr>
+        <p:blipFill>
+          <a:blip r:embed="rId2">
+            <a:extLst>
+              <a:ext uri="{28A0092B-C50C-407E-A947-70E740481C1C}">
+                <a14:useLocalDpi xmlns:a14="http://schemas.microsoft.com/office/drawing/2010/main" val="0"/>
+              </a:ext>
+            </a:extLst>
+          </a:blip>
+          <a:stretch>
+            <a:fillRect/>
+          </a:stretch>
+        </p:blipFill>
+        <p:spPr>
+          <a:xfrm>
+            <a:off x="0" y="-1"/>
+            <a:ext cx="12192000" cy="6858001"/>
+          </a:xfrm>
+          <a:prstGeom prst="rect">
+            <a:avLst/>
+          </a:prstGeom>
+        </p:spPr>
+      </p:pic>
+      <p:sp>
+        <p:nvSpPr>
+          <p:cNvPr id="2" name="Title 1">
+            <a:extLst>
+              <a:ext uri="{FF2B5EF4-FFF2-40B4-BE49-F238E27FC236}">
+                <a16:creationId xmlns:a16="http://schemas.microsoft.com/office/drawing/2014/main" id="{B59C9136-0937-FF2D-F2B9-2129B0390E25}"/>
+              </a:ext>
+            </a:extLst>
+          </p:cNvPr>
+          <p:cNvSpPr>
+            <a:spLocks noGrp="1"/>
+          </p:cNvSpPr>
+          <p:nvPr>
+            <p:ph type="title"/>
+          </p:nvPr>
+        </p:nvSpPr>
+        <p:spPr/>
+        <p:txBody>
+          <a:bodyPr/>
+          <a:lstStyle/>
+          <a:p>
+            <a:r>
+              <a:rPr lang="en-US" b="1" dirty="0">
+                <a:solidFill>
+                  <a:schemeClr val="accent2">
+                    <a:lumMod val="60000"/>
+                    <a:lumOff val="40000"/>
+                  </a:schemeClr>
+                </a:solidFill>
+              </a:rPr>
+              <a:t>Linq with Object</a:t>
+            </a:r>
+            <a:endParaRPr lang="en-IN" b="1" dirty="0">
+              <a:solidFill>
+                <a:schemeClr val="accent2">
+                  <a:lumMod val="60000"/>
+                  <a:lumOff val="40000"/>
+                </a:schemeClr>
+              </a:solidFill>
+            </a:endParaRPr>
+          </a:p>
+        </p:txBody>
+      </p:sp>
+      <p:sp>
+        <p:nvSpPr>
+          <p:cNvPr id="12" name="Arrow: Circular 11">
+            <a:extLst>
+              <a:ext uri="{FF2B5EF4-FFF2-40B4-BE49-F238E27FC236}">
+                <a16:creationId xmlns:a16="http://schemas.microsoft.com/office/drawing/2014/main" id="{585536B1-D495-680A-D9CC-EF05BCD68830}"/>
+              </a:ext>
+            </a:extLst>
+          </p:cNvPr>
+          <p:cNvSpPr/>
+          <p:nvPr/>
+        </p:nvSpPr>
+        <p:spPr>
+          <a:xfrm>
+            <a:off x="4984050" y="1547971"/>
+            <a:ext cx="2094415" cy="2094734"/>
+          </a:xfrm>
+          <a:prstGeom prst="circularArrow">
+            <a:avLst>
+              <a:gd name="adj1" fmla="val 10980"/>
+              <a:gd name="adj2" fmla="val 1142322"/>
+              <a:gd name="adj3" fmla="val 4500000"/>
+              <a:gd name="adj4" fmla="val 10800000"/>
+              <a:gd name="adj5" fmla="val 12500"/>
+            </a:avLst>
+          </a:prstGeom>
+        </p:spPr>
+        <p:style>
+          <a:lnRef idx="0">
+            <a:schemeClr val="lt1">
+              <a:hueOff val="0"/>
+              <a:satOff val="0"/>
+              <a:lumOff val="0"/>
+              <a:alphaOff val="0"/>
+            </a:schemeClr>
+          </a:lnRef>
+          <a:fillRef idx="3">
+            <a:schemeClr val="accent5">
+              <a:hueOff val="0"/>
+              <a:satOff val="0"/>
+              <a:lumOff val="0"/>
+              <a:alphaOff val="0"/>
+            </a:schemeClr>
+          </a:fillRef>
+          <a:effectRef idx="3">
+            <a:schemeClr val="accent5">
+              <a:hueOff val="0"/>
+              <a:satOff val="0"/>
+              <a:lumOff val="0"/>
+              <a:alphaOff val="0"/>
+            </a:schemeClr>
+          </a:effectRef>
+          <a:fontRef idx="minor">
+            <a:schemeClr val="lt1"/>
+          </a:fontRef>
+        </p:style>
+        <p:txBody>
+          <a:bodyPr/>
+          <a:lstStyle/>
+          <a:p>
+            <a:endParaRPr lang="en-IN"/>
+          </a:p>
+        </p:txBody>
+      </p:sp>
+      <p:grpSp>
+        <p:nvGrpSpPr>
+          <p:cNvPr id="13" name="Group 12">
+            <a:extLst>
+              <a:ext uri="{FF2B5EF4-FFF2-40B4-BE49-F238E27FC236}">
+                <a16:creationId xmlns:a16="http://schemas.microsoft.com/office/drawing/2014/main" id="{684EF1FD-6238-47D6-CDCE-7F1F7E5BC7FB}"/>
+              </a:ext>
+            </a:extLst>
+          </p:cNvPr>
+          <p:cNvGrpSpPr/>
+          <p:nvPr/>
+        </p:nvGrpSpPr>
+        <p:grpSpPr>
+          <a:xfrm>
+            <a:off x="5446985" y="2304233"/>
+            <a:ext cx="1163826" cy="581773"/>
+            <a:chOff x="4964385" y="756262"/>
+            <a:chExt cx="1163826" cy="581773"/>
+          </a:xfrm>
+        </p:grpSpPr>
+        <p:sp>
+          <p:nvSpPr>
+            <p:cNvPr id="22" name="Rectangle 21">
+              <a:extLst>
+                <a:ext uri="{FF2B5EF4-FFF2-40B4-BE49-F238E27FC236}">
+                  <a16:creationId xmlns:a16="http://schemas.microsoft.com/office/drawing/2014/main" id="{F898E33E-0A6C-F467-FB68-F444DE4E6A86}"/>
+                </a:ext>
+              </a:extLst>
+            </p:cNvPr>
+            <p:cNvSpPr/>
+            <p:nvPr/>
+          </p:nvSpPr>
+          <p:spPr>
+            <a:xfrm>
+              <a:off x="4964385" y="756262"/>
+              <a:ext cx="1163826" cy="581773"/>
+            </a:xfrm>
+            <a:prstGeom prst="rect">
+              <a:avLst/>
+            </a:prstGeom>
+          </p:spPr>
+          <p:style>
+            <a:lnRef idx="0">
+              <a:schemeClr val="dk1">
+                <a:alpha val="0"/>
+                <a:hueOff val="0"/>
+                <a:satOff val="0"/>
+                <a:lumOff val="0"/>
+                <a:alphaOff val="0"/>
+              </a:schemeClr>
+            </a:lnRef>
+            <a:fillRef idx="0">
+              <a:schemeClr val="lt1">
+                <a:alpha val="0"/>
+                <a:hueOff val="0"/>
+                <a:satOff val="0"/>
+                <a:lumOff val="0"/>
+                <a:alphaOff val="0"/>
+              </a:schemeClr>
+            </a:fillRef>
+            <a:effectRef idx="0">
+              <a:schemeClr val="lt1">
+                <a:alpha val="0"/>
+                <a:hueOff val="0"/>
+                <a:satOff val="0"/>
+                <a:lumOff val="0"/>
+                <a:alphaOff val="0"/>
+              </a:schemeClr>
+            </a:effectRef>
+            <a:fontRef idx="minor">
+              <a:schemeClr val="tx1">
+                <a:hueOff val="0"/>
+                <a:satOff val="0"/>
+                <a:lumOff val="0"/>
+                <a:alphaOff val="0"/>
+              </a:schemeClr>
+            </a:fontRef>
+          </p:style>
+          <p:txBody>
+            <a:bodyPr/>
+            <a:lstStyle/>
+            <a:p>
+              <a:endParaRPr lang="en-IN"/>
+            </a:p>
+          </p:txBody>
+        </p:sp>
+        <p:sp>
+          <p:nvSpPr>
+            <p:cNvPr id="23" name="TextBox 22">
+              <a:extLst>
+                <a:ext uri="{FF2B5EF4-FFF2-40B4-BE49-F238E27FC236}">
+                  <a16:creationId xmlns:a16="http://schemas.microsoft.com/office/drawing/2014/main" id="{09165D33-AB03-5794-14B8-E6C8AC41090E}"/>
+                </a:ext>
+              </a:extLst>
+            </p:cNvPr>
+            <p:cNvSpPr txBox="1"/>
+            <p:nvPr/>
+          </p:nvSpPr>
+          <p:spPr>
+            <a:xfrm>
+              <a:off x="4964385" y="756262"/>
+              <a:ext cx="1163826" cy="581773"/>
+            </a:xfrm>
+            <a:prstGeom prst="rect">
+              <a:avLst/>
+            </a:prstGeom>
+          </p:spPr>
+          <p:style>
+            <a:lnRef idx="0">
+              <a:scrgbClr r="0" g="0" b="0"/>
+            </a:lnRef>
+            <a:fillRef idx="0">
+              <a:scrgbClr r="0" g="0" b="0"/>
+            </a:fillRef>
+            <a:effectRef idx="0">
+              <a:scrgbClr r="0" g="0" b="0"/>
+            </a:effectRef>
+            <a:fontRef idx="minor">
+              <a:schemeClr val="tx1">
+                <a:hueOff val="0"/>
+                <a:satOff val="0"/>
+                <a:lumOff val="0"/>
+                <a:alphaOff val="0"/>
+              </a:schemeClr>
+            </a:fontRef>
+          </p:style>
+          <p:txBody>
+            <a:bodyPr spcFirstLastPara="0" vert="horz" wrap="square" lIns="12065" tIns="12065" rIns="12065" bIns="12065" numCol="1" spcCol="1270" anchor="ctr" anchorCtr="0">
+              <a:noAutofit/>
+            </a:bodyPr>
+            <a:lstStyle/>
+            <a:p>
+              <a:pPr marL="0" lvl="0" indent="0" algn="ctr" defTabSz="844550">
+                <a:lnSpc>
+                  <a:spcPct val="90000"/>
+                </a:lnSpc>
+                <a:spcBef>
+                  <a:spcPct val="0"/>
+                </a:spcBef>
+                <a:spcAft>
+                  <a:spcPct val="35000"/>
+                </a:spcAft>
+                <a:buNone/>
+              </a:pPr>
+              <a:r>
+                <a:rPr lang="en-US" sz="1900" kern="1200" dirty="0">
+                  <a:solidFill>
+                    <a:schemeClr val="bg1">
+                      <a:lumMod val="95000"/>
+                    </a:schemeClr>
+                  </a:solidFill>
+                </a:rPr>
+                <a:t>Object</a:t>
+              </a:r>
+              <a:endParaRPr lang="en-IN" sz="1900" kern="1200" dirty="0">
+                <a:solidFill>
+                  <a:schemeClr val="bg1">
+                    <a:lumMod val="95000"/>
+                  </a:schemeClr>
+                </a:solidFill>
+              </a:endParaRPr>
+            </a:p>
+          </p:txBody>
+        </p:sp>
+      </p:grpSp>
+      <p:sp>
+        <p:nvSpPr>
+          <p:cNvPr id="14" name="Shape 13">
+            <a:extLst>
+              <a:ext uri="{FF2B5EF4-FFF2-40B4-BE49-F238E27FC236}">
+                <a16:creationId xmlns:a16="http://schemas.microsoft.com/office/drawing/2014/main" id="{70A2C7F6-494D-F9DC-2FB5-827D58C732AA}"/>
+              </a:ext>
+            </a:extLst>
+          </p:cNvPr>
+          <p:cNvSpPr/>
+          <p:nvPr/>
+        </p:nvSpPr>
+        <p:spPr>
+          <a:xfrm>
+            <a:off x="4402334" y="2751551"/>
+            <a:ext cx="2094415" cy="2094734"/>
+          </a:xfrm>
+          <a:prstGeom prst="leftCircularArrow">
+            <a:avLst>
+              <a:gd name="adj1" fmla="val 10980"/>
+              <a:gd name="adj2" fmla="val 1142322"/>
+              <a:gd name="adj3" fmla="val 6300000"/>
+              <a:gd name="adj4" fmla="val 18900000"/>
+              <a:gd name="adj5" fmla="val 12500"/>
+            </a:avLst>
+          </a:prstGeom>
+        </p:spPr>
+        <p:style>
+          <a:lnRef idx="0">
+            <a:schemeClr val="lt1">
+              <a:hueOff val="0"/>
+              <a:satOff val="0"/>
+              <a:lumOff val="0"/>
+              <a:alphaOff val="0"/>
+            </a:schemeClr>
+          </a:lnRef>
+          <a:fillRef idx="3">
+            <a:schemeClr val="accent5">
+              <a:hueOff val="-3379271"/>
+              <a:satOff val="-8710"/>
+              <a:lumOff val="-5883"/>
+              <a:alphaOff val="0"/>
+            </a:schemeClr>
+          </a:fillRef>
+          <a:effectRef idx="3">
+            <a:schemeClr val="accent5">
+              <a:hueOff val="-3379271"/>
+              <a:satOff val="-8710"/>
+              <a:lumOff val="-5883"/>
+              <a:alphaOff val="0"/>
+            </a:schemeClr>
+          </a:effectRef>
+          <a:fontRef idx="minor">
+            <a:schemeClr val="lt1"/>
+          </a:fontRef>
+        </p:style>
+        <p:txBody>
+          <a:bodyPr/>
+          <a:lstStyle/>
+          <a:p>
+            <a:endParaRPr lang="en-IN"/>
+          </a:p>
+        </p:txBody>
+      </p:sp>
+      <p:grpSp>
+        <p:nvGrpSpPr>
+          <p:cNvPr id="15" name="Group 14">
+            <a:extLst>
+              <a:ext uri="{FF2B5EF4-FFF2-40B4-BE49-F238E27FC236}">
+                <a16:creationId xmlns:a16="http://schemas.microsoft.com/office/drawing/2014/main" id="{7CE28D78-DE16-C8F3-4EAE-DB01CC484410}"/>
+              </a:ext>
+            </a:extLst>
+          </p:cNvPr>
+          <p:cNvGrpSpPr/>
+          <p:nvPr/>
+        </p:nvGrpSpPr>
+        <p:grpSpPr>
+          <a:xfrm>
+            <a:off x="4867628" y="3514775"/>
+            <a:ext cx="1163826" cy="581773"/>
+            <a:chOff x="4385028" y="1966804"/>
+            <a:chExt cx="1163826" cy="581773"/>
+          </a:xfrm>
+        </p:grpSpPr>
+        <p:sp>
+          <p:nvSpPr>
+            <p:cNvPr id="20" name="Rectangle 19">
+              <a:extLst>
+                <a:ext uri="{FF2B5EF4-FFF2-40B4-BE49-F238E27FC236}">
+                  <a16:creationId xmlns:a16="http://schemas.microsoft.com/office/drawing/2014/main" id="{AE3A4097-ADC6-950A-E96E-413F41194A66}"/>
+                </a:ext>
+              </a:extLst>
+            </p:cNvPr>
+            <p:cNvSpPr/>
+            <p:nvPr/>
+          </p:nvSpPr>
+          <p:spPr>
+            <a:xfrm>
+              <a:off x="4385028" y="1966804"/>
+              <a:ext cx="1163826" cy="581773"/>
+            </a:xfrm>
+            <a:prstGeom prst="rect">
+              <a:avLst/>
+            </a:prstGeom>
+          </p:spPr>
+          <p:style>
+            <a:lnRef idx="0">
+              <a:schemeClr val="dk1">
+                <a:alpha val="0"/>
+                <a:hueOff val="0"/>
+                <a:satOff val="0"/>
+                <a:lumOff val="0"/>
+                <a:alphaOff val="0"/>
+              </a:schemeClr>
+            </a:lnRef>
+            <a:fillRef idx="0">
+              <a:schemeClr val="lt1">
+                <a:alpha val="0"/>
+                <a:hueOff val="0"/>
+                <a:satOff val="0"/>
+                <a:lumOff val="0"/>
+                <a:alphaOff val="0"/>
+              </a:schemeClr>
+            </a:fillRef>
+            <a:effectRef idx="0">
+              <a:schemeClr val="lt1">
+                <a:alpha val="0"/>
+                <a:hueOff val="0"/>
+                <a:satOff val="0"/>
+                <a:lumOff val="0"/>
+                <a:alphaOff val="0"/>
+              </a:schemeClr>
+            </a:effectRef>
+            <a:fontRef idx="minor">
+              <a:schemeClr val="tx1">
+                <a:hueOff val="0"/>
+                <a:satOff val="0"/>
+                <a:lumOff val="0"/>
+                <a:alphaOff val="0"/>
+              </a:schemeClr>
+            </a:fontRef>
+          </p:style>
+          <p:txBody>
+            <a:bodyPr/>
+            <a:lstStyle/>
+            <a:p>
+              <a:endParaRPr lang="en-IN"/>
+            </a:p>
+          </p:txBody>
+        </p:sp>
+        <p:sp>
+          <p:nvSpPr>
+            <p:cNvPr id="21" name="TextBox 20">
+              <a:extLst>
+                <a:ext uri="{FF2B5EF4-FFF2-40B4-BE49-F238E27FC236}">
+                  <a16:creationId xmlns:a16="http://schemas.microsoft.com/office/drawing/2014/main" id="{A4B6F9A6-209E-CBCB-87F4-632321DD8A1A}"/>
+                </a:ext>
+              </a:extLst>
+            </p:cNvPr>
+            <p:cNvSpPr txBox="1"/>
+            <p:nvPr/>
+          </p:nvSpPr>
+          <p:spPr>
+            <a:xfrm>
+              <a:off x="4385028" y="1966804"/>
+              <a:ext cx="1163826" cy="581773"/>
+            </a:xfrm>
+            <a:prstGeom prst="rect">
+              <a:avLst/>
+            </a:prstGeom>
+          </p:spPr>
+          <p:style>
+            <a:lnRef idx="0">
+              <a:scrgbClr r="0" g="0" b="0"/>
+            </a:lnRef>
+            <a:fillRef idx="0">
+              <a:scrgbClr r="0" g="0" b="0"/>
+            </a:fillRef>
+            <a:effectRef idx="0">
+              <a:scrgbClr r="0" g="0" b="0"/>
+            </a:effectRef>
+            <a:fontRef idx="minor">
+              <a:schemeClr val="tx1">
+                <a:hueOff val="0"/>
+                <a:satOff val="0"/>
+                <a:lumOff val="0"/>
+                <a:alphaOff val="0"/>
+              </a:schemeClr>
+            </a:fontRef>
+          </p:style>
+          <p:txBody>
+            <a:bodyPr spcFirstLastPara="0" vert="horz" wrap="square" lIns="12065" tIns="12065" rIns="12065" bIns="12065" numCol="1" spcCol="1270" anchor="ctr" anchorCtr="0">
+              <a:noAutofit/>
+            </a:bodyPr>
+            <a:lstStyle/>
+            <a:p>
+              <a:pPr marL="0" lvl="0" indent="0" algn="ctr" defTabSz="844550">
+                <a:lnSpc>
+                  <a:spcPct val="90000"/>
+                </a:lnSpc>
+                <a:spcBef>
+                  <a:spcPct val="0"/>
+                </a:spcBef>
+                <a:spcAft>
+                  <a:spcPct val="35000"/>
+                </a:spcAft>
+                <a:buNone/>
+              </a:pPr>
+              <a:r>
+                <a:rPr lang="en-US" sz="1900" kern="1200" dirty="0">
+                  <a:solidFill>
+                    <a:schemeClr val="bg1">
+                      <a:lumMod val="95000"/>
+                    </a:schemeClr>
+                  </a:solidFill>
+                </a:rPr>
+                <a:t>Class</a:t>
+              </a:r>
+              <a:endParaRPr lang="en-IN" sz="1900" kern="1200" dirty="0">
+                <a:solidFill>
+                  <a:schemeClr val="bg1">
+                    <a:lumMod val="95000"/>
+                  </a:schemeClr>
+                </a:solidFill>
+              </a:endParaRPr>
+            </a:p>
+          </p:txBody>
+        </p:sp>
+      </p:grpSp>
+      <p:sp>
+        <p:nvSpPr>
+          <p:cNvPr id="16" name="Block Arc 15">
+            <a:extLst>
+              <a:ext uri="{FF2B5EF4-FFF2-40B4-BE49-F238E27FC236}">
+                <a16:creationId xmlns:a16="http://schemas.microsoft.com/office/drawing/2014/main" id="{66EBDBD3-4531-0E8F-9FA4-C39F503AC151}"/>
+              </a:ext>
+            </a:extLst>
+          </p:cNvPr>
+          <p:cNvSpPr/>
+          <p:nvPr/>
+        </p:nvSpPr>
+        <p:spPr>
+          <a:xfrm>
+            <a:off x="5133117" y="4099160"/>
+            <a:ext cx="1799427" cy="1800148"/>
+          </a:xfrm>
+          <a:prstGeom prst="blockArc">
+            <a:avLst>
+              <a:gd name="adj1" fmla="val 13500000"/>
+              <a:gd name="adj2" fmla="val 10800000"/>
+              <a:gd name="adj3" fmla="val 12740"/>
+            </a:avLst>
+          </a:prstGeom>
+        </p:spPr>
+        <p:style>
+          <a:lnRef idx="0">
+            <a:schemeClr val="lt1">
+              <a:hueOff val="0"/>
+              <a:satOff val="0"/>
+              <a:lumOff val="0"/>
+              <a:alphaOff val="0"/>
+            </a:schemeClr>
+          </a:lnRef>
+          <a:fillRef idx="3">
+            <a:schemeClr val="accent5">
+              <a:hueOff val="-6758543"/>
+              <a:satOff val="-17419"/>
+              <a:lumOff val="-11765"/>
+              <a:alphaOff val="0"/>
+            </a:schemeClr>
+          </a:fillRef>
+          <a:effectRef idx="3">
+            <a:schemeClr val="accent5">
+              <a:hueOff val="-6758543"/>
+              <a:satOff val="-17419"/>
+              <a:lumOff val="-11765"/>
+              <a:alphaOff val="0"/>
+            </a:schemeClr>
+          </a:effectRef>
+          <a:fontRef idx="minor">
+            <a:schemeClr val="lt1"/>
+          </a:fontRef>
+        </p:style>
+        <p:txBody>
+          <a:bodyPr/>
+          <a:lstStyle/>
+          <a:p>
+            <a:endParaRPr lang="en-IN"/>
+          </a:p>
+        </p:txBody>
+      </p:sp>
+      <p:grpSp>
+        <p:nvGrpSpPr>
+          <p:cNvPr id="17" name="Group 16">
+            <a:extLst>
+              <a:ext uri="{FF2B5EF4-FFF2-40B4-BE49-F238E27FC236}">
+                <a16:creationId xmlns:a16="http://schemas.microsoft.com/office/drawing/2014/main" id="{E19C5639-0EB3-1EF6-EE3E-7D5267FF4CEC}"/>
+              </a:ext>
+            </a:extLst>
+          </p:cNvPr>
+          <p:cNvGrpSpPr/>
+          <p:nvPr/>
+        </p:nvGrpSpPr>
+        <p:grpSpPr>
+          <a:xfrm>
+            <a:off x="5449738" y="4727058"/>
+            <a:ext cx="1163826" cy="581773"/>
+            <a:chOff x="4967138" y="3179087"/>
+            <a:chExt cx="1163826" cy="581773"/>
+          </a:xfrm>
+        </p:grpSpPr>
+        <p:sp>
+          <p:nvSpPr>
+            <p:cNvPr id="18" name="Rectangle 17">
+              <a:extLst>
+                <a:ext uri="{FF2B5EF4-FFF2-40B4-BE49-F238E27FC236}">
+                  <a16:creationId xmlns:a16="http://schemas.microsoft.com/office/drawing/2014/main" id="{76ABA67C-AE96-E7A8-D8F2-029E48947B66}"/>
+                </a:ext>
+              </a:extLst>
+            </p:cNvPr>
+            <p:cNvSpPr/>
+            <p:nvPr/>
+          </p:nvSpPr>
+          <p:spPr>
+            <a:xfrm>
+              <a:off x="4967138" y="3179087"/>
+              <a:ext cx="1163826" cy="581773"/>
+            </a:xfrm>
+            <a:prstGeom prst="rect">
+              <a:avLst/>
+            </a:prstGeom>
+          </p:spPr>
+          <p:style>
+            <a:lnRef idx="0">
+              <a:schemeClr val="dk1">
+                <a:alpha val="0"/>
+                <a:hueOff val="0"/>
+                <a:satOff val="0"/>
+                <a:lumOff val="0"/>
+                <a:alphaOff val="0"/>
+              </a:schemeClr>
+            </a:lnRef>
+            <a:fillRef idx="0">
+              <a:schemeClr val="lt1">
+                <a:alpha val="0"/>
+                <a:hueOff val="0"/>
+                <a:satOff val="0"/>
+                <a:lumOff val="0"/>
+                <a:alphaOff val="0"/>
+              </a:schemeClr>
+            </a:fillRef>
+            <a:effectRef idx="0">
+              <a:schemeClr val="lt1">
+                <a:alpha val="0"/>
+                <a:hueOff val="0"/>
+                <a:satOff val="0"/>
+                <a:lumOff val="0"/>
+                <a:alphaOff val="0"/>
+              </a:schemeClr>
+            </a:effectRef>
+            <a:fontRef idx="minor">
+              <a:schemeClr val="tx1">
+                <a:hueOff val="0"/>
+                <a:satOff val="0"/>
+                <a:lumOff val="0"/>
+                <a:alphaOff val="0"/>
+              </a:schemeClr>
+            </a:fontRef>
+          </p:style>
+          <p:txBody>
+            <a:bodyPr/>
+            <a:lstStyle/>
+            <a:p>
+              <a:endParaRPr lang="en-IN"/>
+            </a:p>
+          </p:txBody>
+        </p:sp>
+        <p:sp>
+          <p:nvSpPr>
+            <p:cNvPr id="19" name="TextBox 18">
+              <a:extLst>
+                <a:ext uri="{FF2B5EF4-FFF2-40B4-BE49-F238E27FC236}">
+                  <a16:creationId xmlns:a16="http://schemas.microsoft.com/office/drawing/2014/main" id="{6ACCB30F-0AAE-0E12-F216-C4F86ED43013}"/>
+                </a:ext>
+              </a:extLst>
+            </p:cNvPr>
+            <p:cNvSpPr txBox="1"/>
+            <p:nvPr/>
+          </p:nvSpPr>
+          <p:spPr>
+            <a:xfrm>
+              <a:off x="4967138" y="3179087"/>
+              <a:ext cx="1163826" cy="581773"/>
+            </a:xfrm>
+            <a:prstGeom prst="rect">
+              <a:avLst/>
+            </a:prstGeom>
+          </p:spPr>
+          <p:style>
+            <a:lnRef idx="0">
+              <a:scrgbClr r="0" g="0" b="0"/>
+            </a:lnRef>
+            <a:fillRef idx="0">
+              <a:scrgbClr r="0" g="0" b="0"/>
+            </a:fillRef>
+            <a:effectRef idx="0">
+              <a:scrgbClr r="0" g="0" b="0"/>
+            </a:effectRef>
+            <a:fontRef idx="minor">
+              <a:schemeClr val="tx1">
+                <a:hueOff val="0"/>
+                <a:satOff val="0"/>
+                <a:lumOff val="0"/>
+                <a:alphaOff val="0"/>
+              </a:schemeClr>
+            </a:fontRef>
+          </p:style>
+          <p:txBody>
+            <a:bodyPr spcFirstLastPara="0" vert="horz" wrap="square" lIns="12065" tIns="12065" rIns="12065" bIns="12065" numCol="1" spcCol="1270" anchor="ctr" anchorCtr="0">
+              <a:noAutofit/>
+            </a:bodyPr>
+            <a:lstStyle/>
+            <a:p>
+              <a:pPr marL="0" lvl="0" indent="0" algn="ctr" defTabSz="844550">
+                <a:lnSpc>
+                  <a:spcPct val="90000"/>
+                </a:lnSpc>
+                <a:spcBef>
+                  <a:spcPct val="0"/>
+                </a:spcBef>
+                <a:spcAft>
+                  <a:spcPct val="35000"/>
+                </a:spcAft>
+                <a:buNone/>
+              </a:pPr>
+              <a:r>
+                <a:rPr lang="en-US" sz="1900" kern="1200" dirty="0">
+                  <a:solidFill>
+                    <a:schemeClr val="bg1">
+                      <a:lumMod val="95000"/>
+                    </a:schemeClr>
+                  </a:solidFill>
+                </a:rPr>
+                <a:t>Custom Datatype</a:t>
+              </a:r>
+              <a:endParaRPr lang="en-IN" sz="1900" kern="1200" dirty="0">
+                <a:solidFill>
+                  <a:schemeClr val="bg1">
+                    <a:lumMod val="95000"/>
+                  </a:schemeClr>
+                </a:solidFill>
+              </a:endParaRPr>
+            </a:p>
+          </p:txBody>
+        </p:sp>
+      </p:grpSp>
+    </p:spTree>
+    <p:extLst>
+      <p:ext uri="{BB962C8B-B14F-4D97-AF65-F5344CB8AC3E}">
+        <p14:creationId xmlns:p14="http://schemas.microsoft.com/office/powerpoint/2010/main" val="4030922404"/>
+      </p:ext>
+    </p:extLst>
+  </p:cSld>
+  <p:clrMapOvr>
+    <a:masterClrMapping/>
+  </p:clrMapOvr>
+  <p:timing>
+    <p:tnLst>
+      <p:par>
+        <p:cTn id="1" dur="indefinite" restart="never" nodeType="tmRoot">
+          <p:childTnLst>
+            <p:seq concurrent="1" nextAc="seek">
+              <p:cTn id="2" dur="indefinite" nodeType="mainSeq">
+                <p:childTnLst>
+                  <p:par>
+                    <p:cTn id="3" fill="hold">
+                      <p:stCondLst>
+                        <p:cond delay="indefinite"/>
+                      </p:stCondLst>
+                      <p:childTnLst>
+                        <p:par>
+                          <p:cTn id="4" fill="hold">
+                            <p:stCondLst>
+                              <p:cond delay="0"/>
+                            </p:stCondLst>
+                            <p:childTnLst>
+                              <p:par>
+                                <p:cTn id="5" presetID="10" presetClass="entr" presetSubtype="0" fill="hold" nodeType="clickEffect">
+                                  <p:stCondLst>
+                                    <p:cond delay="0"/>
+                                  </p:stCondLst>
+                                  <p:childTnLst>
+                                    <p:set>
+                                      <p:cBhvr>
+                                        <p:cTn id="6" dur="1" fill="hold">
+                                          <p:stCondLst>
+                                            <p:cond delay="0"/>
+                                          </p:stCondLst>
+                                        </p:cTn>
+                                        <p:tgtEl>
+                                          <p:spTgt spid="12"/>
+                                        </p:tgtEl>
+                                        <p:attrNameLst>
+                                          <p:attrName>style.visibility</p:attrName>
+                                        </p:attrNameLst>
+                                      </p:cBhvr>
+                                      <p:to>
+                                        <p:strVal val="visible"/>
+                                      </p:to>
+                                    </p:set>
+                                    <p:animEffect transition="in" filter="fade">
+                                      <p:cBhvr>
+                                        <p:cTn id="7" dur="500"/>
+                                        <p:tgtEl>
+                                          <p:spTgt spid="12"/>
+                                        </p:tgtEl>
+                                      </p:cBhvr>
+                                    </p:animEffect>
+                                  </p:childTnLst>
+                                </p:cTn>
+                              </p:par>
+                              <p:par>
+                                <p:cTn id="8" presetID="10" presetClass="entr" presetSubtype="0" fill="hold" nodeType="withEffect">
+                                  <p:stCondLst>
+                                    <p:cond delay="0"/>
+                                  </p:stCondLst>
+                                  <p:childTnLst>
+                                    <p:set>
+                                      <p:cBhvr>
+                                        <p:cTn id="9" dur="1" fill="hold">
+                                          <p:stCondLst>
+                                            <p:cond delay="0"/>
+                                          </p:stCondLst>
+                                        </p:cTn>
+                                        <p:tgtEl>
+                                          <p:spTgt spid="13"/>
+                                        </p:tgtEl>
+                                        <p:attrNameLst>
+                                          <p:attrName>style.visibility</p:attrName>
+                                        </p:attrNameLst>
+                                      </p:cBhvr>
+                                      <p:to>
+                                        <p:strVal val="visible"/>
+                                      </p:to>
+                                    </p:set>
+                                    <p:animEffect transition="in" filter="fade">
+                                      <p:cBhvr>
+                                        <p:cTn id="10" dur="500"/>
+                                        <p:tgtEl>
+                                          <p:spTgt spid="13"/>
+                                        </p:tgtEl>
+                                      </p:cBhvr>
+                                    </p:animEffect>
+                                  </p:childTnLst>
+                                </p:cTn>
+                              </p:par>
+                            </p:childTnLst>
+                          </p:cTn>
+                        </p:par>
+                      </p:childTnLst>
+                    </p:cTn>
+                  </p:par>
+                  <p:par>
+                    <p:cTn id="11" fill="hold">
+                      <p:stCondLst>
+                        <p:cond delay="indefinite"/>
+                      </p:stCondLst>
+                      <p:childTnLst>
+                        <p:par>
+                          <p:cTn id="12" fill="hold">
+                            <p:stCondLst>
+                              <p:cond delay="0"/>
+                            </p:stCondLst>
+                            <p:childTnLst>
+                              <p:par>
+                                <p:cTn id="13" presetID="10" presetClass="entr" presetSubtype="0" fill="hold" nodeType="clickEffect">
+                                  <p:stCondLst>
+                                    <p:cond delay="0"/>
+                                  </p:stCondLst>
+                                  <p:childTnLst>
+                                    <p:set>
+                                      <p:cBhvr>
+                                        <p:cTn id="14" dur="1" fill="hold">
+                                          <p:stCondLst>
+                                            <p:cond delay="0"/>
+                                          </p:stCondLst>
+                                        </p:cTn>
+                                        <p:tgtEl>
+                                          <p:spTgt spid="14"/>
+                                        </p:tgtEl>
+                                        <p:attrNameLst>
+                                          <p:attrName>style.visibility</p:attrName>
+                                        </p:attrNameLst>
+                                      </p:cBhvr>
+                                      <p:to>
+                                        <p:strVal val="visible"/>
+                                      </p:to>
+                                    </p:set>
+                                    <p:animEffect transition="in" filter="fade">
+                                      <p:cBhvr>
+                                        <p:cTn id="15" dur="500"/>
+                                        <p:tgtEl>
+                                          <p:spTgt spid="14"/>
+                                        </p:tgtEl>
+                                      </p:cBhvr>
+                                    </p:animEffect>
+                                  </p:childTnLst>
+                                </p:cTn>
+                              </p:par>
+                              <p:par>
+                                <p:cTn id="16" presetID="10" presetClass="entr" presetSubtype="0" fill="hold" nodeType="withEffect">
+                                  <p:stCondLst>
+                                    <p:cond delay="0"/>
+                                  </p:stCondLst>
+                                  <p:childTnLst>
+                                    <p:set>
+                                      <p:cBhvr>
+                                        <p:cTn id="17" dur="1" fill="hold">
+                                          <p:stCondLst>
+                                            <p:cond delay="0"/>
+                                          </p:stCondLst>
+                                        </p:cTn>
+                                        <p:tgtEl>
+                                          <p:spTgt spid="15"/>
+                                        </p:tgtEl>
+                                        <p:attrNameLst>
+                                          <p:attrName>style.visibility</p:attrName>
+                                        </p:attrNameLst>
+                                      </p:cBhvr>
+                                      <p:to>
+                                        <p:strVal val="visible"/>
+                                      </p:to>
+                                    </p:set>
+                                    <p:animEffect transition="in" filter="fade">
+                                      <p:cBhvr>
+                                        <p:cTn id="18" dur="500"/>
+                                        <p:tgtEl>
+                                          <p:spTgt spid="15"/>
+                                        </p:tgtEl>
+                                      </p:cBhvr>
+                                    </p:animEffect>
+                                  </p:childTnLst>
+                                </p:cTn>
+                              </p:par>
+                            </p:childTnLst>
+                          </p:cTn>
+                        </p:par>
+                      </p:childTnLst>
+                    </p:cTn>
+                  </p:par>
+                  <p:par>
+                    <p:cTn id="19" fill="hold">
+                      <p:stCondLst>
+                        <p:cond delay="indefinite"/>
+                      </p:stCondLst>
+                      <p:childTnLst>
+                        <p:par>
+                          <p:cTn id="20" fill="hold">
+                            <p:stCondLst>
+                              <p:cond delay="0"/>
+                            </p:stCondLst>
+                            <p:childTnLst>
+                              <p:par>
+                                <p:cTn id="21" presetID="10" presetClass="entr" presetSubtype="0" fill="hold" nodeType="clickEffect">
+                                  <p:stCondLst>
+                                    <p:cond delay="0"/>
+                                  </p:stCondLst>
+                                  <p:childTnLst>
+                                    <p:set>
+                                      <p:cBhvr>
+                                        <p:cTn id="22" dur="1" fill="hold">
+                                          <p:stCondLst>
+                                            <p:cond delay="0"/>
+                                          </p:stCondLst>
+                                        </p:cTn>
+                                        <p:tgtEl>
+                                          <p:spTgt spid="16"/>
+                                        </p:tgtEl>
+                                        <p:attrNameLst>
+                                          <p:attrName>style.visibility</p:attrName>
+                                        </p:attrNameLst>
+                                      </p:cBhvr>
+                                      <p:to>
+                                        <p:strVal val="visible"/>
+                                      </p:to>
+                                    </p:set>
+                                    <p:animEffect transition="in" filter="fade">
+                                      <p:cBhvr>
+                                        <p:cTn id="23" dur="500"/>
+                                        <p:tgtEl>
+                                          <p:spTgt spid="16"/>
+                                        </p:tgtEl>
+                                      </p:cBhvr>
+                                    </p:animEffect>
+                                  </p:childTnLst>
+                                </p:cTn>
+                              </p:par>
+                              <p:par>
+                                <p:cTn id="24" presetID="10" presetClass="entr" presetSubtype="0" fill="hold" nodeType="withEffect">
+                                  <p:stCondLst>
+                                    <p:cond delay="0"/>
+                                  </p:stCondLst>
+                                  <p:childTnLst>
+                                    <p:set>
+                                      <p:cBhvr>
+                                        <p:cTn id="25" dur="1" fill="hold">
+                                          <p:stCondLst>
+                                            <p:cond delay="0"/>
+                                          </p:stCondLst>
+                                        </p:cTn>
+                                        <p:tgtEl>
+                                          <p:spTgt spid="17"/>
+                                        </p:tgtEl>
+                                        <p:attrNameLst>
+                                          <p:attrName>style.visibility</p:attrName>
+                                        </p:attrNameLst>
+                                      </p:cBhvr>
+                                      <p:to>
+                                        <p:strVal val="visible"/>
+                                      </p:to>
+                                    </p:set>
+                                    <p:animEffect transition="in" filter="fade">
+                                      <p:cBhvr>
+                                        <p:cTn id="26" dur="500"/>
+                                        <p:tgtEl>
+                                          <p:spTgt spid="17"/>
+                                        </p:tgtEl>
+                                      </p:cBhvr>
+                                    </p:animEffect>
+                                  </p:childTnLst>
+                                </p:cTn>
+                              </p:par>
+                            </p:childTnLst>
+                          </p:cTn>
+                        </p:par>
+                      </p:childTnLst>
+                    </p:cTn>
+                  </p:par>
+                </p:childTnLst>
+              </p:cTn>
+              <p:prevCondLst>
+                <p:cond evt="onPrev" delay="0">
+                  <p:tgtEl>
+                    <p:sldTgt/>
+                  </p:tgtEl>
+                </p:cond>
+              </p:prevCondLst>
+              <p:nextCondLst>
+                <p:cond evt="onNext" delay="0">
+                  <p:tgtEl>
+                    <p:sldTgt/>
+                  </p:tgtEl>
+                </p:cond>
+              </p:nextCondLst>
+            </p:seq>
+          </p:childTnLst>
+        </p:cTn>
+      </p:par>
+    </p:tnLst>
+  </p:timing>
+</p:sld>
+</file>
+
+<file path=ppt/slides/slide7.xml><?xml version="1.0" encoding="utf-8"?>
 <p:sld xmlns:a="http://schemas.openxmlformats.org/drawingml/2006/main" xmlns:r="http://schemas.openxmlformats.org/officeDocument/2006/relationships" xmlns:p="http://schemas.openxmlformats.org/presentationml/2006/main">
   <p:cSld>
     <p:spTree>
@@ -15669,7 +17641,7 @@
                   </a:schemeClr>
                 </a:solidFill>
               </a:rPr>
-              <a:t>Where, TypeOf</a:t>
+              <a:t>Where, OfType</a:t>
             </a:r>
           </a:p>
           <a:p>
@@ -15843,10 +17815,617 @@
   <p:clrMapOvr>
     <a:masterClrMapping/>
   </p:clrMapOvr>
+  <p:timing>
+    <p:tnLst>
+      <p:par>
+        <p:cTn id="1" dur="indefinite" restart="never" nodeType="tmRoot">
+          <p:childTnLst>
+            <p:seq concurrent="1" nextAc="seek">
+              <p:cTn id="2" dur="indefinite" nodeType="mainSeq">
+                <p:childTnLst>
+                  <p:par>
+                    <p:cTn id="3" fill="hold">
+                      <p:stCondLst>
+                        <p:cond delay="indefinite"/>
+                      </p:stCondLst>
+                      <p:childTnLst>
+                        <p:par>
+                          <p:cTn id="4" fill="hold">
+                            <p:stCondLst>
+                              <p:cond delay="0"/>
+                            </p:stCondLst>
+                            <p:childTnLst>
+                              <p:par>
+                                <p:cTn id="5" presetID="10" presetClass="entr" presetSubtype="0" fill="hold" grpId="0" nodeType="clickEffect">
+                                  <p:stCondLst>
+                                    <p:cond delay="0"/>
+                                  </p:stCondLst>
+                                  <p:childTnLst>
+                                    <p:set>
+                                      <p:cBhvr>
+                                        <p:cTn id="6" dur="1" fill="hold">
+                                          <p:stCondLst>
+                                            <p:cond delay="0"/>
+                                          </p:stCondLst>
+                                        </p:cTn>
+                                        <p:tgtEl>
+                                          <p:spTgt spid="2"/>
+                                        </p:tgtEl>
+                                        <p:attrNameLst>
+                                          <p:attrName>style.visibility</p:attrName>
+                                        </p:attrNameLst>
+                                      </p:cBhvr>
+                                      <p:to>
+                                        <p:strVal val="visible"/>
+                                      </p:to>
+                                    </p:set>
+                                    <p:animEffect transition="in" filter="fade">
+                                      <p:cBhvr>
+                                        <p:cTn id="7" dur="500"/>
+                                        <p:tgtEl>
+                                          <p:spTgt spid="2"/>
+                                        </p:tgtEl>
+                                      </p:cBhvr>
+                                    </p:animEffect>
+                                  </p:childTnLst>
+                                </p:cTn>
+                              </p:par>
+                            </p:childTnLst>
+                          </p:cTn>
+                        </p:par>
+                      </p:childTnLst>
+                    </p:cTn>
+                  </p:par>
+                  <p:par>
+                    <p:cTn id="8" fill="hold">
+                      <p:stCondLst>
+                        <p:cond delay="indefinite"/>
+                      </p:stCondLst>
+                      <p:childTnLst>
+                        <p:par>
+                          <p:cTn id="9" fill="hold">
+                            <p:stCondLst>
+                              <p:cond delay="0"/>
+                            </p:stCondLst>
+                            <p:childTnLst>
+                              <p:par>
+                                <p:cTn id="10" presetID="10" presetClass="entr" presetSubtype="0" fill="hold" grpId="0" nodeType="clickEffect">
+                                  <p:stCondLst>
+                                    <p:cond delay="0"/>
+                                  </p:stCondLst>
+                                  <p:childTnLst>
+                                    <p:set>
+                                      <p:cBhvr>
+                                        <p:cTn id="11" dur="1" fill="hold">
+                                          <p:stCondLst>
+                                            <p:cond delay="0"/>
+                                          </p:stCondLst>
+                                        </p:cTn>
+                                        <p:tgtEl>
+                                          <p:spTgt spid="3">
+                                            <p:txEl>
+                                              <p:pRg st="0" end="0"/>
+                                            </p:txEl>
+                                          </p:spTgt>
+                                        </p:tgtEl>
+                                        <p:attrNameLst>
+                                          <p:attrName>style.visibility</p:attrName>
+                                        </p:attrNameLst>
+                                      </p:cBhvr>
+                                      <p:to>
+                                        <p:strVal val="visible"/>
+                                      </p:to>
+                                    </p:set>
+                                    <p:animEffect transition="in" filter="fade">
+                                      <p:cBhvr>
+                                        <p:cTn id="12" dur="500"/>
+                                        <p:tgtEl>
+                                          <p:spTgt spid="3">
+                                            <p:txEl>
+                                              <p:pRg st="0" end="0"/>
+                                            </p:txEl>
+                                          </p:spTgt>
+                                        </p:tgtEl>
+                                      </p:cBhvr>
+                                    </p:animEffect>
+                                  </p:childTnLst>
+                                </p:cTn>
+                              </p:par>
+                              <p:par>
+                                <p:cTn id="13" presetID="10" presetClass="entr" presetSubtype="0" fill="hold" grpId="0" nodeType="withEffect">
+                                  <p:stCondLst>
+                                    <p:cond delay="0"/>
+                                  </p:stCondLst>
+                                  <p:childTnLst>
+                                    <p:set>
+                                      <p:cBhvr>
+                                        <p:cTn id="14" dur="1" fill="hold">
+                                          <p:stCondLst>
+                                            <p:cond delay="0"/>
+                                          </p:stCondLst>
+                                        </p:cTn>
+                                        <p:tgtEl>
+                                          <p:spTgt spid="3">
+                                            <p:txEl>
+                                              <p:pRg st="1" end="1"/>
+                                            </p:txEl>
+                                          </p:spTgt>
+                                        </p:tgtEl>
+                                        <p:attrNameLst>
+                                          <p:attrName>style.visibility</p:attrName>
+                                        </p:attrNameLst>
+                                      </p:cBhvr>
+                                      <p:to>
+                                        <p:strVal val="visible"/>
+                                      </p:to>
+                                    </p:set>
+                                    <p:animEffect transition="in" filter="fade">
+                                      <p:cBhvr>
+                                        <p:cTn id="15" dur="500"/>
+                                        <p:tgtEl>
+                                          <p:spTgt spid="3">
+                                            <p:txEl>
+                                              <p:pRg st="1" end="1"/>
+                                            </p:txEl>
+                                          </p:spTgt>
+                                        </p:tgtEl>
+                                      </p:cBhvr>
+                                    </p:animEffect>
+                                  </p:childTnLst>
+                                </p:cTn>
+                              </p:par>
+                            </p:childTnLst>
+                          </p:cTn>
+                        </p:par>
+                      </p:childTnLst>
+                    </p:cTn>
+                  </p:par>
+                  <p:par>
+                    <p:cTn id="16" fill="hold">
+                      <p:stCondLst>
+                        <p:cond delay="indefinite"/>
+                      </p:stCondLst>
+                      <p:childTnLst>
+                        <p:par>
+                          <p:cTn id="17" fill="hold">
+                            <p:stCondLst>
+                              <p:cond delay="0"/>
+                            </p:stCondLst>
+                            <p:childTnLst>
+                              <p:par>
+                                <p:cTn id="18" presetID="10" presetClass="entr" presetSubtype="0" fill="hold" grpId="0" nodeType="clickEffect">
+                                  <p:stCondLst>
+                                    <p:cond delay="0"/>
+                                  </p:stCondLst>
+                                  <p:childTnLst>
+                                    <p:set>
+                                      <p:cBhvr>
+                                        <p:cTn id="19" dur="1" fill="hold">
+                                          <p:stCondLst>
+                                            <p:cond delay="0"/>
+                                          </p:stCondLst>
+                                        </p:cTn>
+                                        <p:tgtEl>
+                                          <p:spTgt spid="3">
+                                            <p:txEl>
+                                              <p:pRg st="2" end="2"/>
+                                            </p:txEl>
+                                          </p:spTgt>
+                                        </p:tgtEl>
+                                        <p:attrNameLst>
+                                          <p:attrName>style.visibility</p:attrName>
+                                        </p:attrNameLst>
+                                      </p:cBhvr>
+                                      <p:to>
+                                        <p:strVal val="visible"/>
+                                      </p:to>
+                                    </p:set>
+                                    <p:animEffect transition="in" filter="fade">
+                                      <p:cBhvr>
+                                        <p:cTn id="20" dur="500"/>
+                                        <p:tgtEl>
+                                          <p:spTgt spid="3">
+                                            <p:txEl>
+                                              <p:pRg st="2" end="2"/>
+                                            </p:txEl>
+                                          </p:spTgt>
+                                        </p:tgtEl>
+                                      </p:cBhvr>
+                                    </p:animEffect>
+                                  </p:childTnLst>
+                                </p:cTn>
+                              </p:par>
+                              <p:par>
+                                <p:cTn id="21" presetID="10" presetClass="entr" presetSubtype="0" fill="hold" grpId="0" nodeType="withEffect">
+                                  <p:stCondLst>
+                                    <p:cond delay="0"/>
+                                  </p:stCondLst>
+                                  <p:childTnLst>
+                                    <p:set>
+                                      <p:cBhvr>
+                                        <p:cTn id="22" dur="1" fill="hold">
+                                          <p:stCondLst>
+                                            <p:cond delay="0"/>
+                                          </p:stCondLst>
+                                        </p:cTn>
+                                        <p:tgtEl>
+                                          <p:spTgt spid="3">
+                                            <p:txEl>
+                                              <p:pRg st="3" end="3"/>
+                                            </p:txEl>
+                                          </p:spTgt>
+                                        </p:tgtEl>
+                                        <p:attrNameLst>
+                                          <p:attrName>style.visibility</p:attrName>
+                                        </p:attrNameLst>
+                                      </p:cBhvr>
+                                      <p:to>
+                                        <p:strVal val="visible"/>
+                                      </p:to>
+                                    </p:set>
+                                    <p:animEffect transition="in" filter="fade">
+                                      <p:cBhvr>
+                                        <p:cTn id="23" dur="500"/>
+                                        <p:tgtEl>
+                                          <p:spTgt spid="3">
+                                            <p:txEl>
+                                              <p:pRg st="3" end="3"/>
+                                            </p:txEl>
+                                          </p:spTgt>
+                                        </p:tgtEl>
+                                      </p:cBhvr>
+                                    </p:animEffect>
+                                  </p:childTnLst>
+                                </p:cTn>
+                              </p:par>
+                            </p:childTnLst>
+                          </p:cTn>
+                        </p:par>
+                      </p:childTnLst>
+                    </p:cTn>
+                  </p:par>
+                  <p:par>
+                    <p:cTn id="24" fill="hold">
+                      <p:stCondLst>
+                        <p:cond delay="indefinite"/>
+                      </p:stCondLst>
+                      <p:childTnLst>
+                        <p:par>
+                          <p:cTn id="25" fill="hold">
+                            <p:stCondLst>
+                              <p:cond delay="0"/>
+                            </p:stCondLst>
+                            <p:childTnLst>
+                              <p:par>
+                                <p:cTn id="26" presetID="10" presetClass="entr" presetSubtype="0" fill="hold" grpId="0" nodeType="clickEffect">
+                                  <p:stCondLst>
+                                    <p:cond delay="0"/>
+                                  </p:stCondLst>
+                                  <p:childTnLst>
+                                    <p:set>
+                                      <p:cBhvr>
+                                        <p:cTn id="27" dur="1" fill="hold">
+                                          <p:stCondLst>
+                                            <p:cond delay="0"/>
+                                          </p:stCondLst>
+                                        </p:cTn>
+                                        <p:tgtEl>
+                                          <p:spTgt spid="3">
+                                            <p:txEl>
+                                              <p:pRg st="4" end="4"/>
+                                            </p:txEl>
+                                          </p:spTgt>
+                                        </p:tgtEl>
+                                        <p:attrNameLst>
+                                          <p:attrName>style.visibility</p:attrName>
+                                        </p:attrNameLst>
+                                      </p:cBhvr>
+                                      <p:to>
+                                        <p:strVal val="visible"/>
+                                      </p:to>
+                                    </p:set>
+                                    <p:animEffect transition="in" filter="fade">
+                                      <p:cBhvr>
+                                        <p:cTn id="28" dur="500"/>
+                                        <p:tgtEl>
+                                          <p:spTgt spid="3">
+                                            <p:txEl>
+                                              <p:pRg st="4" end="4"/>
+                                            </p:txEl>
+                                          </p:spTgt>
+                                        </p:tgtEl>
+                                      </p:cBhvr>
+                                    </p:animEffect>
+                                  </p:childTnLst>
+                                </p:cTn>
+                              </p:par>
+                              <p:par>
+                                <p:cTn id="29" presetID="10" presetClass="entr" presetSubtype="0" fill="hold" grpId="0" nodeType="withEffect">
+                                  <p:stCondLst>
+                                    <p:cond delay="0"/>
+                                  </p:stCondLst>
+                                  <p:childTnLst>
+                                    <p:set>
+                                      <p:cBhvr>
+                                        <p:cTn id="30" dur="1" fill="hold">
+                                          <p:stCondLst>
+                                            <p:cond delay="0"/>
+                                          </p:stCondLst>
+                                        </p:cTn>
+                                        <p:tgtEl>
+                                          <p:spTgt spid="3">
+                                            <p:txEl>
+                                              <p:pRg st="5" end="5"/>
+                                            </p:txEl>
+                                          </p:spTgt>
+                                        </p:tgtEl>
+                                        <p:attrNameLst>
+                                          <p:attrName>style.visibility</p:attrName>
+                                        </p:attrNameLst>
+                                      </p:cBhvr>
+                                      <p:to>
+                                        <p:strVal val="visible"/>
+                                      </p:to>
+                                    </p:set>
+                                    <p:animEffect transition="in" filter="fade">
+                                      <p:cBhvr>
+                                        <p:cTn id="31" dur="500"/>
+                                        <p:tgtEl>
+                                          <p:spTgt spid="3">
+                                            <p:txEl>
+                                              <p:pRg st="5" end="5"/>
+                                            </p:txEl>
+                                          </p:spTgt>
+                                        </p:tgtEl>
+                                      </p:cBhvr>
+                                    </p:animEffect>
+                                  </p:childTnLst>
+                                </p:cTn>
+                              </p:par>
+                            </p:childTnLst>
+                          </p:cTn>
+                        </p:par>
+                      </p:childTnLst>
+                    </p:cTn>
+                  </p:par>
+                  <p:par>
+                    <p:cTn id="32" fill="hold">
+                      <p:stCondLst>
+                        <p:cond delay="indefinite"/>
+                      </p:stCondLst>
+                      <p:childTnLst>
+                        <p:par>
+                          <p:cTn id="33" fill="hold">
+                            <p:stCondLst>
+                              <p:cond delay="0"/>
+                            </p:stCondLst>
+                            <p:childTnLst>
+                              <p:par>
+                                <p:cTn id="34" presetID="10" presetClass="entr" presetSubtype="0" fill="hold" grpId="0" nodeType="clickEffect">
+                                  <p:stCondLst>
+                                    <p:cond delay="0"/>
+                                  </p:stCondLst>
+                                  <p:childTnLst>
+                                    <p:set>
+                                      <p:cBhvr>
+                                        <p:cTn id="35" dur="1" fill="hold">
+                                          <p:stCondLst>
+                                            <p:cond delay="0"/>
+                                          </p:stCondLst>
+                                        </p:cTn>
+                                        <p:tgtEl>
+                                          <p:spTgt spid="3">
+                                            <p:txEl>
+                                              <p:pRg st="6" end="6"/>
+                                            </p:txEl>
+                                          </p:spTgt>
+                                        </p:tgtEl>
+                                        <p:attrNameLst>
+                                          <p:attrName>style.visibility</p:attrName>
+                                        </p:attrNameLst>
+                                      </p:cBhvr>
+                                      <p:to>
+                                        <p:strVal val="visible"/>
+                                      </p:to>
+                                    </p:set>
+                                    <p:animEffect transition="in" filter="fade">
+                                      <p:cBhvr>
+                                        <p:cTn id="36" dur="500"/>
+                                        <p:tgtEl>
+                                          <p:spTgt spid="3">
+                                            <p:txEl>
+                                              <p:pRg st="6" end="6"/>
+                                            </p:txEl>
+                                          </p:spTgt>
+                                        </p:tgtEl>
+                                      </p:cBhvr>
+                                    </p:animEffect>
+                                  </p:childTnLst>
+                                </p:cTn>
+                              </p:par>
+                              <p:par>
+                                <p:cTn id="37" presetID="10" presetClass="entr" presetSubtype="0" fill="hold" grpId="0" nodeType="withEffect">
+                                  <p:stCondLst>
+                                    <p:cond delay="0"/>
+                                  </p:stCondLst>
+                                  <p:childTnLst>
+                                    <p:set>
+                                      <p:cBhvr>
+                                        <p:cTn id="38" dur="1" fill="hold">
+                                          <p:stCondLst>
+                                            <p:cond delay="0"/>
+                                          </p:stCondLst>
+                                        </p:cTn>
+                                        <p:tgtEl>
+                                          <p:spTgt spid="3">
+                                            <p:txEl>
+                                              <p:pRg st="7" end="7"/>
+                                            </p:txEl>
+                                          </p:spTgt>
+                                        </p:tgtEl>
+                                        <p:attrNameLst>
+                                          <p:attrName>style.visibility</p:attrName>
+                                        </p:attrNameLst>
+                                      </p:cBhvr>
+                                      <p:to>
+                                        <p:strVal val="visible"/>
+                                      </p:to>
+                                    </p:set>
+                                    <p:animEffect transition="in" filter="fade">
+                                      <p:cBhvr>
+                                        <p:cTn id="39" dur="500"/>
+                                        <p:tgtEl>
+                                          <p:spTgt spid="3">
+                                            <p:txEl>
+                                              <p:pRg st="7" end="7"/>
+                                            </p:txEl>
+                                          </p:spTgt>
+                                        </p:tgtEl>
+                                      </p:cBhvr>
+                                    </p:animEffect>
+                                  </p:childTnLst>
+                                </p:cTn>
+                              </p:par>
+                            </p:childTnLst>
+                          </p:cTn>
+                        </p:par>
+                      </p:childTnLst>
+                    </p:cTn>
+                  </p:par>
+                  <p:par>
+                    <p:cTn id="40" fill="hold">
+                      <p:stCondLst>
+                        <p:cond delay="indefinite"/>
+                      </p:stCondLst>
+                      <p:childTnLst>
+                        <p:par>
+                          <p:cTn id="41" fill="hold">
+                            <p:stCondLst>
+                              <p:cond delay="0"/>
+                            </p:stCondLst>
+                            <p:childTnLst>
+                              <p:par>
+                                <p:cTn id="42" presetID="10" presetClass="entr" presetSubtype="0" fill="hold" grpId="0" nodeType="clickEffect">
+                                  <p:stCondLst>
+                                    <p:cond delay="0"/>
+                                  </p:stCondLst>
+                                  <p:childTnLst>
+                                    <p:set>
+                                      <p:cBhvr>
+                                        <p:cTn id="43" dur="1" fill="hold">
+                                          <p:stCondLst>
+                                            <p:cond delay="0"/>
+                                          </p:stCondLst>
+                                        </p:cTn>
+                                        <p:tgtEl>
+                                          <p:spTgt spid="3">
+                                            <p:txEl>
+                                              <p:pRg st="8" end="8"/>
+                                            </p:txEl>
+                                          </p:spTgt>
+                                        </p:tgtEl>
+                                        <p:attrNameLst>
+                                          <p:attrName>style.visibility</p:attrName>
+                                        </p:attrNameLst>
+                                      </p:cBhvr>
+                                      <p:to>
+                                        <p:strVal val="visible"/>
+                                      </p:to>
+                                    </p:set>
+                                    <p:animEffect transition="in" filter="fade">
+                                      <p:cBhvr>
+                                        <p:cTn id="44" dur="500"/>
+                                        <p:tgtEl>
+                                          <p:spTgt spid="3">
+                                            <p:txEl>
+                                              <p:pRg st="8" end="8"/>
+                                            </p:txEl>
+                                          </p:spTgt>
+                                        </p:tgtEl>
+                                      </p:cBhvr>
+                                    </p:animEffect>
+                                  </p:childTnLst>
+                                </p:cTn>
+                              </p:par>
+                              <p:par>
+                                <p:cTn id="45" presetID="10" presetClass="entr" presetSubtype="0" fill="hold" grpId="0" nodeType="withEffect">
+                                  <p:stCondLst>
+                                    <p:cond delay="0"/>
+                                  </p:stCondLst>
+                                  <p:childTnLst>
+                                    <p:set>
+                                      <p:cBhvr>
+                                        <p:cTn id="46" dur="1" fill="hold">
+                                          <p:stCondLst>
+                                            <p:cond delay="0"/>
+                                          </p:stCondLst>
+                                        </p:cTn>
+                                        <p:tgtEl>
+                                          <p:spTgt spid="3">
+                                            <p:txEl>
+                                              <p:pRg st="9" end="9"/>
+                                            </p:txEl>
+                                          </p:spTgt>
+                                        </p:tgtEl>
+                                        <p:attrNameLst>
+                                          <p:attrName>style.visibility</p:attrName>
+                                        </p:attrNameLst>
+                                      </p:cBhvr>
+                                      <p:to>
+                                        <p:strVal val="visible"/>
+                                      </p:to>
+                                    </p:set>
+                                    <p:animEffect transition="in" filter="fade">
+                                      <p:cBhvr>
+                                        <p:cTn id="47" dur="500"/>
+                                        <p:tgtEl>
+                                          <p:spTgt spid="3">
+                                            <p:txEl>
+                                              <p:pRg st="9" end="9"/>
+                                            </p:txEl>
+                                          </p:spTgt>
+                                        </p:tgtEl>
+                                      </p:cBhvr>
+                                    </p:animEffect>
+                                  </p:childTnLst>
+                                </p:cTn>
+                              </p:par>
+                            </p:childTnLst>
+                          </p:cTn>
+                        </p:par>
+                      </p:childTnLst>
+                    </p:cTn>
+                  </p:par>
+                </p:childTnLst>
+              </p:cTn>
+              <p:prevCondLst>
+                <p:cond evt="onPrev" delay="0">
+                  <p:tgtEl>
+                    <p:sldTgt/>
+                  </p:tgtEl>
+                </p:cond>
+              </p:prevCondLst>
+              <p:nextCondLst>
+                <p:cond evt="onNext" delay="0">
+                  <p:tgtEl>
+                    <p:sldTgt/>
+                  </p:tgtEl>
+                </p:cond>
+              </p:nextCondLst>
+            </p:seq>
+          </p:childTnLst>
+        </p:cTn>
+      </p:par>
+    </p:tnLst>
+    <p:bldLst>
+      <p:bldP spid="2" grpId="0"/>
+      <p:bldP spid="3" grpId="0" build="p"/>
+    </p:bldLst>
+  </p:timing>
 </p:sld>
 </file>
 
-<file path=ppt/slides/slide7.xml><?xml version="1.0" encoding="utf-8"?>
+<file path=ppt/slides/slide8.xml><?xml version="1.0" encoding="utf-8"?>
 <p:sld xmlns:a="http://schemas.openxmlformats.org/drawingml/2006/main" xmlns:r="http://schemas.openxmlformats.org/officeDocument/2006/relationships" xmlns:p="http://schemas.openxmlformats.org/presentationml/2006/main">
   <p:cSld>
     <p:spTree>
@@ -16178,128 +18757,559 @@
   <p:clrMapOvr>
     <a:masterClrMapping/>
   </p:clrMapOvr>
-</p:sld>
-</file>
-
-<file path=ppt/slides/slide8.xml><?xml version="1.0" encoding="utf-8"?>
-<p:sld xmlns:a="http://schemas.openxmlformats.org/drawingml/2006/main" xmlns:r="http://schemas.openxmlformats.org/officeDocument/2006/relationships" xmlns:p="http://schemas.openxmlformats.org/presentationml/2006/main">
-  <p:cSld>
-    <p:spTree>
-      <p:nvGrpSpPr>
-        <p:cNvPr id="1" name="">
-          <a:extLst>
-            <a:ext uri="{FF2B5EF4-FFF2-40B4-BE49-F238E27FC236}">
-              <a16:creationId xmlns:a16="http://schemas.microsoft.com/office/drawing/2014/main" id="{FC68B9D3-0BC3-107C-D900-4DC26FB85BBD}"/>
-            </a:ext>
-          </a:extLst>
-        </p:cNvPr>
-        <p:cNvGrpSpPr/>
-        <p:nvPr/>
-      </p:nvGrpSpPr>
-      <p:grpSpPr>
-        <a:xfrm>
-          <a:off x="0" y="0"/>
-          <a:ext cx="0" cy="0"/>
-          <a:chOff x="0" y="0"/>
-          <a:chExt cx="0" cy="0"/>
-        </a:xfrm>
-      </p:grpSpPr>
-      <p:pic>
-        <p:nvPicPr>
-          <p:cNvPr id="5" name="Picture 4">
-            <a:extLst>
-              <a:ext uri="{FF2B5EF4-FFF2-40B4-BE49-F238E27FC236}">
-                <a16:creationId xmlns:a16="http://schemas.microsoft.com/office/drawing/2014/main" id="{1A612FC7-F634-7707-2603-B98EC4A18039}"/>
-              </a:ext>
-            </a:extLst>
-          </p:cNvPr>
-          <p:cNvPicPr>
-            <a:picLocks noChangeAspect="1"/>
-          </p:cNvPicPr>
-          <p:nvPr/>
-        </p:nvPicPr>
-        <p:blipFill>
-          <a:blip r:embed="rId2">
-            <a:extLst>
-              <a:ext uri="{28A0092B-C50C-407E-A947-70E740481C1C}">
-                <a14:useLocalDpi xmlns:a14="http://schemas.microsoft.com/office/drawing/2010/main" val="0"/>
-              </a:ext>
-            </a:extLst>
-          </a:blip>
-          <a:stretch>
-            <a:fillRect/>
-          </a:stretch>
-        </p:blipFill>
-        <p:spPr>
-          <a:xfrm>
-            <a:off x="0" y="-1"/>
-            <a:ext cx="12192000" cy="6858001"/>
-          </a:xfrm>
-          <a:prstGeom prst="rect">
-            <a:avLst/>
-          </a:prstGeom>
-        </p:spPr>
-      </p:pic>
-      <p:sp>
-        <p:nvSpPr>
-          <p:cNvPr id="2" name="Title 1">
-            <a:extLst>
-              <a:ext uri="{FF2B5EF4-FFF2-40B4-BE49-F238E27FC236}">
-                <a16:creationId xmlns:a16="http://schemas.microsoft.com/office/drawing/2014/main" id="{B59C9136-0937-FF2D-F2B9-2129B0390E25}"/>
-              </a:ext>
-            </a:extLst>
-          </p:cNvPr>
-          <p:cNvSpPr>
-            <a:spLocks noGrp="1"/>
-          </p:cNvSpPr>
-          <p:nvPr>
-            <p:ph type="title"/>
-          </p:nvPr>
-        </p:nvSpPr>
-        <p:spPr/>
-        <p:txBody>
-          <a:bodyPr/>
-          <a:lstStyle/>
-          <a:p>
-            <a:endParaRPr lang="en-IN"/>
-          </a:p>
-        </p:txBody>
-      </p:sp>
-      <p:sp>
-        <p:nvSpPr>
-          <p:cNvPr id="3" name="Content Placeholder 2">
-            <a:extLst>
-              <a:ext uri="{FF2B5EF4-FFF2-40B4-BE49-F238E27FC236}">
-                <a16:creationId xmlns:a16="http://schemas.microsoft.com/office/drawing/2014/main" id="{5615F1B7-0297-5C11-44CF-2D354FEE79AD}"/>
-              </a:ext>
-            </a:extLst>
-          </p:cNvPr>
-          <p:cNvSpPr>
-            <a:spLocks noGrp="1"/>
-          </p:cNvSpPr>
-          <p:nvPr>
-            <p:ph idx="1"/>
-          </p:nvPr>
-        </p:nvSpPr>
-        <p:spPr/>
-        <p:txBody>
-          <a:bodyPr/>
-          <a:lstStyle/>
-          <a:p>
-            <a:endParaRPr lang="en-IN"/>
-          </a:p>
-        </p:txBody>
-      </p:sp>
-    </p:spTree>
-    <p:extLst>
-      <p:ext uri="{BB962C8B-B14F-4D97-AF65-F5344CB8AC3E}">
-        <p14:creationId xmlns:p14="http://schemas.microsoft.com/office/powerpoint/2010/main" val="4030922404"/>
-      </p:ext>
-    </p:extLst>
-  </p:cSld>
-  <p:clrMapOvr>
-    <a:masterClrMapping/>
-  </p:clrMapOvr>
+  <p:timing>
+    <p:tnLst>
+      <p:par>
+        <p:cTn id="1" dur="indefinite" restart="never" nodeType="tmRoot">
+          <p:childTnLst>
+            <p:seq concurrent="1" nextAc="seek">
+              <p:cTn id="2" dur="indefinite" nodeType="mainSeq">
+                <p:childTnLst>
+                  <p:par>
+                    <p:cTn id="3" fill="hold">
+                      <p:stCondLst>
+                        <p:cond delay="indefinite"/>
+                      </p:stCondLst>
+                      <p:childTnLst>
+                        <p:par>
+                          <p:cTn id="4" fill="hold">
+                            <p:stCondLst>
+                              <p:cond delay="0"/>
+                            </p:stCondLst>
+                            <p:childTnLst>
+                              <p:par>
+                                <p:cTn id="5" presetID="10" presetClass="entr" presetSubtype="0" fill="hold" grpId="0" nodeType="clickEffect">
+                                  <p:stCondLst>
+                                    <p:cond delay="0"/>
+                                  </p:stCondLst>
+                                  <p:childTnLst>
+                                    <p:set>
+                                      <p:cBhvr>
+                                        <p:cTn id="6" dur="1" fill="hold">
+                                          <p:stCondLst>
+                                            <p:cond delay="0"/>
+                                          </p:stCondLst>
+                                        </p:cTn>
+                                        <p:tgtEl>
+                                          <p:spTgt spid="3">
+                                            <p:txEl>
+                                              <p:pRg st="0" end="0"/>
+                                            </p:txEl>
+                                          </p:spTgt>
+                                        </p:tgtEl>
+                                        <p:attrNameLst>
+                                          <p:attrName>style.visibility</p:attrName>
+                                        </p:attrNameLst>
+                                      </p:cBhvr>
+                                      <p:to>
+                                        <p:strVal val="visible"/>
+                                      </p:to>
+                                    </p:set>
+                                    <p:animEffect transition="in" filter="fade">
+                                      <p:cBhvr>
+                                        <p:cTn id="7" dur="500"/>
+                                        <p:tgtEl>
+                                          <p:spTgt spid="3">
+                                            <p:txEl>
+                                              <p:pRg st="0" end="0"/>
+                                            </p:txEl>
+                                          </p:spTgt>
+                                        </p:tgtEl>
+                                      </p:cBhvr>
+                                    </p:animEffect>
+                                  </p:childTnLst>
+                                </p:cTn>
+                              </p:par>
+                              <p:par>
+                                <p:cTn id="8" presetID="10" presetClass="entr" presetSubtype="0" fill="hold" grpId="0" nodeType="withEffect">
+                                  <p:stCondLst>
+                                    <p:cond delay="0"/>
+                                  </p:stCondLst>
+                                  <p:childTnLst>
+                                    <p:set>
+                                      <p:cBhvr>
+                                        <p:cTn id="9" dur="1" fill="hold">
+                                          <p:stCondLst>
+                                            <p:cond delay="0"/>
+                                          </p:stCondLst>
+                                        </p:cTn>
+                                        <p:tgtEl>
+                                          <p:spTgt spid="3">
+                                            <p:txEl>
+                                              <p:pRg st="1" end="1"/>
+                                            </p:txEl>
+                                          </p:spTgt>
+                                        </p:tgtEl>
+                                        <p:attrNameLst>
+                                          <p:attrName>style.visibility</p:attrName>
+                                        </p:attrNameLst>
+                                      </p:cBhvr>
+                                      <p:to>
+                                        <p:strVal val="visible"/>
+                                      </p:to>
+                                    </p:set>
+                                    <p:animEffect transition="in" filter="fade">
+                                      <p:cBhvr>
+                                        <p:cTn id="10" dur="500"/>
+                                        <p:tgtEl>
+                                          <p:spTgt spid="3">
+                                            <p:txEl>
+                                              <p:pRg st="1" end="1"/>
+                                            </p:txEl>
+                                          </p:spTgt>
+                                        </p:tgtEl>
+                                      </p:cBhvr>
+                                    </p:animEffect>
+                                  </p:childTnLst>
+                                </p:cTn>
+                              </p:par>
+                            </p:childTnLst>
+                          </p:cTn>
+                        </p:par>
+                      </p:childTnLst>
+                    </p:cTn>
+                  </p:par>
+                  <p:par>
+                    <p:cTn id="11" fill="hold">
+                      <p:stCondLst>
+                        <p:cond delay="indefinite"/>
+                      </p:stCondLst>
+                      <p:childTnLst>
+                        <p:par>
+                          <p:cTn id="12" fill="hold">
+                            <p:stCondLst>
+                              <p:cond delay="0"/>
+                            </p:stCondLst>
+                            <p:childTnLst>
+                              <p:par>
+                                <p:cTn id="13" presetID="10" presetClass="entr" presetSubtype="0" fill="hold" grpId="0" nodeType="clickEffect">
+                                  <p:stCondLst>
+                                    <p:cond delay="0"/>
+                                  </p:stCondLst>
+                                  <p:childTnLst>
+                                    <p:set>
+                                      <p:cBhvr>
+                                        <p:cTn id="14" dur="1" fill="hold">
+                                          <p:stCondLst>
+                                            <p:cond delay="0"/>
+                                          </p:stCondLst>
+                                        </p:cTn>
+                                        <p:tgtEl>
+                                          <p:spTgt spid="3">
+                                            <p:txEl>
+                                              <p:pRg st="2" end="2"/>
+                                            </p:txEl>
+                                          </p:spTgt>
+                                        </p:tgtEl>
+                                        <p:attrNameLst>
+                                          <p:attrName>style.visibility</p:attrName>
+                                        </p:attrNameLst>
+                                      </p:cBhvr>
+                                      <p:to>
+                                        <p:strVal val="visible"/>
+                                      </p:to>
+                                    </p:set>
+                                    <p:animEffect transition="in" filter="fade">
+                                      <p:cBhvr>
+                                        <p:cTn id="15" dur="500"/>
+                                        <p:tgtEl>
+                                          <p:spTgt spid="3">
+                                            <p:txEl>
+                                              <p:pRg st="2" end="2"/>
+                                            </p:txEl>
+                                          </p:spTgt>
+                                        </p:tgtEl>
+                                      </p:cBhvr>
+                                    </p:animEffect>
+                                  </p:childTnLst>
+                                </p:cTn>
+                              </p:par>
+                              <p:par>
+                                <p:cTn id="16" presetID="10" presetClass="entr" presetSubtype="0" fill="hold" grpId="0" nodeType="withEffect">
+                                  <p:stCondLst>
+                                    <p:cond delay="0"/>
+                                  </p:stCondLst>
+                                  <p:childTnLst>
+                                    <p:set>
+                                      <p:cBhvr>
+                                        <p:cTn id="17" dur="1" fill="hold">
+                                          <p:stCondLst>
+                                            <p:cond delay="0"/>
+                                          </p:stCondLst>
+                                        </p:cTn>
+                                        <p:tgtEl>
+                                          <p:spTgt spid="3">
+                                            <p:txEl>
+                                              <p:pRg st="3" end="3"/>
+                                            </p:txEl>
+                                          </p:spTgt>
+                                        </p:tgtEl>
+                                        <p:attrNameLst>
+                                          <p:attrName>style.visibility</p:attrName>
+                                        </p:attrNameLst>
+                                      </p:cBhvr>
+                                      <p:to>
+                                        <p:strVal val="visible"/>
+                                      </p:to>
+                                    </p:set>
+                                    <p:animEffect transition="in" filter="fade">
+                                      <p:cBhvr>
+                                        <p:cTn id="18" dur="500"/>
+                                        <p:tgtEl>
+                                          <p:spTgt spid="3">
+                                            <p:txEl>
+                                              <p:pRg st="3" end="3"/>
+                                            </p:txEl>
+                                          </p:spTgt>
+                                        </p:tgtEl>
+                                      </p:cBhvr>
+                                    </p:animEffect>
+                                  </p:childTnLst>
+                                </p:cTn>
+                              </p:par>
+                            </p:childTnLst>
+                          </p:cTn>
+                        </p:par>
+                      </p:childTnLst>
+                    </p:cTn>
+                  </p:par>
+                  <p:par>
+                    <p:cTn id="19" fill="hold">
+                      <p:stCondLst>
+                        <p:cond delay="indefinite"/>
+                      </p:stCondLst>
+                      <p:childTnLst>
+                        <p:par>
+                          <p:cTn id="20" fill="hold">
+                            <p:stCondLst>
+                              <p:cond delay="0"/>
+                            </p:stCondLst>
+                            <p:childTnLst>
+                              <p:par>
+                                <p:cTn id="21" presetID="10" presetClass="entr" presetSubtype="0" fill="hold" grpId="0" nodeType="clickEffect">
+                                  <p:stCondLst>
+                                    <p:cond delay="0"/>
+                                  </p:stCondLst>
+                                  <p:childTnLst>
+                                    <p:set>
+                                      <p:cBhvr>
+                                        <p:cTn id="22" dur="1" fill="hold">
+                                          <p:stCondLst>
+                                            <p:cond delay="0"/>
+                                          </p:stCondLst>
+                                        </p:cTn>
+                                        <p:tgtEl>
+                                          <p:spTgt spid="3">
+                                            <p:txEl>
+                                              <p:pRg st="4" end="4"/>
+                                            </p:txEl>
+                                          </p:spTgt>
+                                        </p:tgtEl>
+                                        <p:attrNameLst>
+                                          <p:attrName>style.visibility</p:attrName>
+                                        </p:attrNameLst>
+                                      </p:cBhvr>
+                                      <p:to>
+                                        <p:strVal val="visible"/>
+                                      </p:to>
+                                    </p:set>
+                                    <p:animEffect transition="in" filter="fade">
+                                      <p:cBhvr>
+                                        <p:cTn id="23" dur="500"/>
+                                        <p:tgtEl>
+                                          <p:spTgt spid="3">
+                                            <p:txEl>
+                                              <p:pRg st="4" end="4"/>
+                                            </p:txEl>
+                                          </p:spTgt>
+                                        </p:tgtEl>
+                                      </p:cBhvr>
+                                    </p:animEffect>
+                                  </p:childTnLst>
+                                </p:cTn>
+                              </p:par>
+                              <p:par>
+                                <p:cTn id="24" presetID="10" presetClass="entr" presetSubtype="0" fill="hold" grpId="0" nodeType="withEffect">
+                                  <p:stCondLst>
+                                    <p:cond delay="0"/>
+                                  </p:stCondLst>
+                                  <p:childTnLst>
+                                    <p:set>
+                                      <p:cBhvr>
+                                        <p:cTn id="25" dur="1" fill="hold">
+                                          <p:stCondLst>
+                                            <p:cond delay="0"/>
+                                          </p:stCondLst>
+                                        </p:cTn>
+                                        <p:tgtEl>
+                                          <p:spTgt spid="3">
+                                            <p:txEl>
+                                              <p:pRg st="5" end="5"/>
+                                            </p:txEl>
+                                          </p:spTgt>
+                                        </p:tgtEl>
+                                        <p:attrNameLst>
+                                          <p:attrName>style.visibility</p:attrName>
+                                        </p:attrNameLst>
+                                      </p:cBhvr>
+                                      <p:to>
+                                        <p:strVal val="visible"/>
+                                      </p:to>
+                                    </p:set>
+                                    <p:animEffect transition="in" filter="fade">
+                                      <p:cBhvr>
+                                        <p:cTn id="26" dur="500"/>
+                                        <p:tgtEl>
+                                          <p:spTgt spid="3">
+                                            <p:txEl>
+                                              <p:pRg st="5" end="5"/>
+                                            </p:txEl>
+                                          </p:spTgt>
+                                        </p:tgtEl>
+                                      </p:cBhvr>
+                                    </p:animEffect>
+                                  </p:childTnLst>
+                                </p:cTn>
+                              </p:par>
+                            </p:childTnLst>
+                          </p:cTn>
+                        </p:par>
+                      </p:childTnLst>
+                    </p:cTn>
+                  </p:par>
+                  <p:par>
+                    <p:cTn id="27" fill="hold">
+                      <p:stCondLst>
+                        <p:cond delay="indefinite"/>
+                      </p:stCondLst>
+                      <p:childTnLst>
+                        <p:par>
+                          <p:cTn id="28" fill="hold">
+                            <p:stCondLst>
+                              <p:cond delay="0"/>
+                            </p:stCondLst>
+                            <p:childTnLst>
+                              <p:par>
+                                <p:cTn id="29" presetID="10" presetClass="entr" presetSubtype="0" fill="hold" grpId="0" nodeType="clickEffect">
+                                  <p:stCondLst>
+                                    <p:cond delay="0"/>
+                                  </p:stCondLst>
+                                  <p:childTnLst>
+                                    <p:set>
+                                      <p:cBhvr>
+                                        <p:cTn id="30" dur="1" fill="hold">
+                                          <p:stCondLst>
+                                            <p:cond delay="0"/>
+                                          </p:stCondLst>
+                                        </p:cTn>
+                                        <p:tgtEl>
+                                          <p:spTgt spid="3">
+                                            <p:txEl>
+                                              <p:pRg st="6" end="6"/>
+                                            </p:txEl>
+                                          </p:spTgt>
+                                        </p:tgtEl>
+                                        <p:attrNameLst>
+                                          <p:attrName>style.visibility</p:attrName>
+                                        </p:attrNameLst>
+                                      </p:cBhvr>
+                                      <p:to>
+                                        <p:strVal val="visible"/>
+                                      </p:to>
+                                    </p:set>
+                                    <p:animEffect transition="in" filter="fade">
+                                      <p:cBhvr>
+                                        <p:cTn id="31" dur="500"/>
+                                        <p:tgtEl>
+                                          <p:spTgt spid="3">
+                                            <p:txEl>
+                                              <p:pRg st="6" end="6"/>
+                                            </p:txEl>
+                                          </p:spTgt>
+                                        </p:tgtEl>
+                                      </p:cBhvr>
+                                    </p:animEffect>
+                                  </p:childTnLst>
+                                </p:cTn>
+                              </p:par>
+                              <p:par>
+                                <p:cTn id="32" presetID="10" presetClass="entr" presetSubtype="0" fill="hold" grpId="0" nodeType="withEffect">
+                                  <p:stCondLst>
+                                    <p:cond delay="0"/>
+                                  </p:stCondLst>
+                                  <p:childTnLst>
+                                    <p:set>
+                                      <p:cBhvr>
+                                        <p:cTn id="33" dur="1" fill="hold">
+                                          <p:stCondLst>
+                                            <p:cond delay="0"/>
+                                          </p:stCondLst>
+                                        </p:cTn>
+                                        <p:tgtEl>
+                                          <p:spTgt spid="3">
+                                            <p:txEl>
+                                              <p:pRg st="7" end="7"/>
+                                            </p:txEl>
+                                          </p:spTgt>
+                                        </p:tgtEl>
+                                        <p:attrNameLst>
+                                          <p:attrName>style.visibility</p:attrName>
+                                        </p:attrNameLst>
+                                      </p:cBhvr>
+                                      <p:to>
+                                        <p:strVal val="visible"/>
+                                      </p:to>
+                                    </p:set>
+                                    <p:animEffect transition="in" filter="fade">
+                                      <p:cBhvr>
+                                        <p:cTn id="34" dur="500"/>
+                                        <p:tgtEl>
+                                          <p:spTgt spid="3">
+                                            <p:txEl>
+                                              <p:pRg st="7" end="7"/>
+                                            </p:txEl>
+                                          </p:spTgt>
+                                        </p:tgtEl>
+                                      </p:cBhvr>
+                                    </p:animEffect>
+                                  </p:childTnLst>
+                                </p:cTn>
+                              </p:par>
+                            </p:childTnLst>
+                          </p:cTn>
+                        </p:par>
+                      </p:childTnLst>
+                    </p:cTn>
+                  </p:par>
+                  <p:par>
+                    <p:cTn id="35" fill="hold">
+                      <p:stCondLst>
+                        <p:cond delay="indefinite"/>
+                      </p:stCondLst>
+                      <p:childTnLst>
+                        <p:par>
+                          <p:cTn id="36" fill="hold">
+                            <p:stCondLst>
+                              <p:cond delay="0"/>
+                            </p:stCondLst>
+                            <p:childTnLst>
+                              <p:par>
+                                <p:cTn id="37" presetID="10" presetClass="entr" presetSubtype="0" fill="hold" grpId="0" nodeType="clickEffect">
+                                  <p:stCondLst>
+                                    <p:cond delay="0"/>
+                                  </p:stCondLst>
+                                  <p:childTnLst>
+                                    <p:set>
+                                      <p:cBhvr>
+                                        <p:cTn id="38" dur="1" fill="hold">
+                                          <p:stCondLst>
+                                            <p:cond delay="0"/>
+                                          </p:stCondLst>
+                                        </p:cTn>
+                                        <p:tgtEl>
+                                          <p:spTgt spid="3">
+                                            <p:txEl>
+                                              <p:pRg st="8" end="8"/>
+                                            </p:txEl>
+                                          </p:spTgt>
+                                        </p:tgtEl>
+                                        <p:attrNameLst>
+                                          <p:attrName>style.visibility</p:attrName>
+                                        </p:attrNameLst>
+                                      </p:cBhvr>
+                                      <p:to>
+                                        <p:strVal val="visible"/>
+                                      </p:to>
+                                    </p:set>
+                                    <p:animEffect transition="in" filter="fade">
+                                      <p:cBhvr>
+                                        <p:cTn id="39" dur="500"/>
+                                        <p:tgtEl>
+                                          <p:spTgt spid="3">
+                                            <p:txEl>
+                                              <p:pRg st="8" end="8"/>
+                                            </p:txEl>
+                                          </p:spTgt>
+                                        </p:tgtEl>
+                                      </p:cBhvr>
+                                    </p:animEffect>
+                                  </p:childTnLst>
+                                </p:cTn>
+                              </p:par>
+                              <p:par>
+                                <p:cTn id="40" presetID="10" presetClass="entr" presetSubtype="0" fill="hold" grpId="0" nodeType="withEffect">
+                                  <p:stCondLst>
+                                    <p:cond delay="0"/>
+                                  </p:stCondLst>
+                                  <p:childTnLst>
+                                    <p:set>
+                                      <p:cBhvr>
+                                        <p:cTn id="41" dur="1" fill="hold">
+                                          <p:stCondLst>
+                                            <p:cond delay="0"/>
+                                          </p:stCondLst>
+                                        </p:cTn>
+                                        <p:tgtEl>
+                                          <p:spTgt spid="3">
+                                            <p:txEl>
+                                              <p:pRg st="9" end="9"/>
+                                            </p:txEl>
+                                          </p:spTgt>
+                                        </p:tgtEl>
+                                        <p:attrNameLst>
+                                          <p:attrName>style.visibility</p:attrName>
+                                        </p:attrNameLst>
+                                      </p:cBhvr>
+                                      <p:to>
+                                        <p:strVal val="visible"/>
+                                      </p:to>
+                                    </p:set>
+                                    <p:animEffect transition="in" filter="fade">
+                                      <p:cBhvr>
+                                        <p:cTn id="42" dur="500"/>
+                                        <p:tgtEl>
+                                          <p:spTgt spid="3">
+                                            <p:txEl>
+                                              <p:pRg st="9" end="9"/>
+                                            </p:txEl>
+                                          </p:spTgt>
+                                        </p:tgtEl>
+                                      </p:cBhvr>
+                                    </p:animEffect>
+                                  </p:childTnLst>
+                                </p:cTn>
+                              </p:par>
+                            </p:childTnLst>
+                          </p:cTn>
+                        </p:par>
+                      </p:childTnLst>
+                    </p:cTn>
+                  </p:par>
+                </p:childTnLst>
+              </p:cTn>
+              <p:prevCondLst>
+                <p:cond evt="onPrev" delay="0">
+                  <p:tgtEl>
+                    <p:sldTgt/>
+                  </p:tgtEl>
+                </p:cond>
+              </p:prevCondLst>
+              <p:nextCondLst>
+                <p:cond evt="onNext" delay="0">
+                  <p:tgtEl>
+                    <p:sldTgt/>
+                  </p:tgtEl>
+                </p:cond>
+              </p:nextCondLst>
+            </p:seq>
+          </p:childTnLst>
+        </p:cTn>
+      </p:par>
+    </p:tnLst>
+    <p:bldLst>
+      <p:bldP spid="3" grpId="0" build="p"/>
+    </p:bldLst>
+  </p:timing>
 </p:sld>
 </file>
 
@@ -16378,37 +19388,32 @@
             <p:ph type="title"/>
           </p:nvPr>
         </p:nvSpPr>
-        <p:spPr/>
+        <p:spPr>
+          <a:xfrm>
+            <a:off x="838200" y="2766217"/>
+            <a:ext cx="10515600" cy="1325563"/>
+          </a:xfrm>
+        </p:spPr>
         <p:txBody>
-          <a:bodyPr/>
+          <a:bodyPr>
+            <a:noAutofit/>
+          </a:bodyPr>
           <a:lstStyle/>
           <a:p>
-            <a:endParaRPr lang="en-IN"/>
-          </a:p>
-        </p:txBody>
-      </p:sp>
-      <p:sp>
-        <p:nvSpPr>
-          <p:cNvPr id="3" name="Content Placeholder 2">
-            <a:extLst>
-              <a:ext uri="{FF2B5EF4-FFF2-40B4-BE49-F238E27FC236}">
-                <a16:creationId xmlns:a16="http://schemas.microsoft.com/office/drawing/2014/main" id="{3DC8ADB0-5D2D-444F-304B-EE76681B5A3E}"/>
-              </a:ext>
-            </a:extLst>
-          </p:cNvPr>
-          <p:cNvSpPr>
-            <a:spLocks noGrp="1"/>
-          </p:cNvSpPr>
-          <p:nvPr>
-            <p:ph idx="1"/>
-          </p:nvPr>
-        </p:nvSpPr>
-        <p:spPr/>
-        <p:txBody>
-          <a:bodyPr/>
-          <a:lstStyle/>
-          <a:p>
-            <a:endParaRPr lang="en-IN"/>
+            <a:pPr algn="ctr"/>
+            <a:r>
+              <a:rPr lang="en-US" sz="6600" b="1" dirty="0">
+                <a:solidFill>
+                  <a:srgbClr val="00B0F0"/>
+                </a:solidFill>
+              </a:rPr>
+              <a:t>Congratulations for Complete the Course</a:t>
+            </a:r>
+            <a:endParaRPr lang="en-IN" sz="6600" b="1" dirty="0">
+              <a:solidFill>
+                <a:srgbClr val="00B0F0"/>
+              </a:solidFill>
+            </a:endParaRPr>
           </a:p>
         </p:txBody>
       </p:sp>
